--- a/ppt/MahekNaaz_X24217808_solar-farm-monitoring.pptx
+++ b/ppt/MahekNaaz_X24217808_solar-farm-monitoring.pptx
@@ -1150,20 +1150,59 @@
         </p:nvSpPr>
         <p:spPr>
           <a:xfrm>
-            <a:off x="640080" y="914400"/>
-            <a:ext cx="10972800" cy="1280160"/>
-          </a:xfrm>
-          <a:prstGeom prst="rect">
-            <a:avLst/>
-          </a:prstGeom>
-          <a:noFill/>
-          <a:ln/>
-        </p:spPr>
-        <p:txBody>
-          <a:bodyPr wrap="square" rtlCol="0" anchor="t"/>
-          <a:lstStyle/>
-          <a:p>
-            <a:pPr algn="l" indent="0" marL="0">
+            <a:off x="658368" y="640080"/>
+            <a:ext cx="10972800" cy="365760"/>
+          </a:xfrm>
+          <a:prstGeom prst="rect">
+            <a:avLst/>
+          </a:prstGeom>
+          <a:noFill/>
+          <a:ln/>
+        </p:spPr>
+        <p:txBody>
+          <a:bodyPr wrap="square" rtlCol="0" anchor="ctr"/>
+          <a:lstStyle/>
+          <a:p>
+            <a:pPr indent="0" marL="0">
+              <a:buNone/>
+            </a:pPr>
+            <a:r>
+              <a:rPr lang="en-US" sz="1400" b="1" spc="300" kern="0" dirty="0">
+                <a:solidFill>
+                  <a:srgbClr val="E7C24A"/>
+                </a:solidFill>
+                <a:latin typeface="Calibri" pitchFamily="34" charset="0"/>
+                <a:ea typeface="Calibri" pitchFamily="34" charset="-122"/>
+                <a:cs typeface="Calibri" pitchFamily="34" charset="-120"/>
+              </a:rPr>
+              <a:t>SOLAR FARM PERFORMANCE MONITORING</a:t>
+            </a:r>
+            <a:endParaRPr lang="en-US" sz="1400" dirty="0"/>
+          </a:p>
+        </p:txBody>
+      </p:sp>
+      <p:sp>
+        <p:nvSpPr>
+          <p:cNvPr id="3" name="Text 1"/>
+          <p:cNvSpPr/>
+          <p:nvPr/>
+        </p:nvSpPr>
+        <p:spPr>
+          <a:xfrm>
+            <a:off x="640080" y="2514600"/>
+            <a:ext cx="10972800" cy="1188720"/>
+          </a:xfrm>
+          <a:prstGeom prst="rect">
+            <a:avLst/>
+          </a:prstGeom>
+          <a:noFill/>
+          <a:ln/>
+        </p:spPr>
+        <p:txBody>
+          <a:bodyPr wrap="square" rtlCol="0" anchor="ctr"/>
+          <a:lstStyle/>
+          <a:p>
+            <a:pPr indent="0" marL="0">
               <a:buNone/>
             </a:pPr>
             <a:r>
@@ -1183,13 +1222,13 @@
       </p:sp>
       <p:sp>
         <p:nvSpPr>
-          <p:cNvPr id="3" name="Text 1"/>
-          <p:cNvSpPr/>
-          <p:nvPr/>
-        </p:nvSpPr>
-        <p:spPr>
-          <a:xfrm>
-            <a:off x="658368" y="2148840"/>
+          <p:cNvPr id="4" name="Text 2"/>
+          <p:cNvSpPr/>
+          <p:nvPr/>
+        </p:nvSpPr>
+        <p:spPr>
+          <a:xfrm>
+            <a:off x="658368" y="3703320"/>
             <a:ext cx="10972800" cy="365760"/>
           </a:xfrm>
           <a:prstGeom prst="rect">
@@ -1222,14 +1261,14 @@
       </p:sp>
       <p:sp>
         <p:nvSpPr>
-          <p:cNvPr id="4" name="Text 2"/>
-          <p:cNvSpPr/>
-          <p:nvPr/>
-        </p:nvSpPr>
-        <p:spPr>
-          <a:xfrm>
-            <a:off x="658368" y="2697480"/>
-            <a:ext cx="10424160" cy="1371600"/>
+          <p:cNvPr id="5" name="Text 3"/>
+          <p:cNvSpPr/>
+          <p:nvPr/>
+        </p:nvSpPr>
+        <p:spPr>
+          <a:xfrm>
+            <a:off x="658368" y="4251960"/>
+            <a:ext cx="10424160" cy="1188720"/>
           </a:xfrm>
           <a:prstGeom prst="rect">
             <a:avLst/>
@@ -1243,12 +1282,12 @@
           <a:p>
             <a:pPr indent="0" marL="0">
               <a:lnSpc>
-                <a:spcPct val="110000"/>
+                <a:spcPct val="108000"/>
               </a:lnSpc>
               <a:buNone/>
             </a:pPr>
             <a:r>
-              <a:rPr lang="en-US" sz="2000" dirty="0">
+              <a:rPr lang="en-US" sz="1800" dirty="0">
                 <a:solidFill>
                   <a:srgbClr val="EAD9B8"/>
                 </a:solidFill>
@@ -1258,19 +1297,19 @@
               </a:rPr>
               <a:t>Panels lose efficiency as they run hotter and dust builds up gradually — a fault that appears between manual inspections keeps costing energy, silently, until someone happens to look.</a:t>
             </a:r>
-            <a:endParaRPr lang="en-US" sz="2000" dirty="0"/>
-          </a:p>
-        </p:txBody>
-      </p:sp>
-      <p:sp>
-        <p:nvSpPr>
-          <p:cNvPr id="5" name="Shape 3"/>
-          <p:cNvSpPr/>
-          <p:nvPr/>
-        </p:nvSpPr>
-        <p:spPr>
-          <a:xfrm>
-            <a:off x="658368" y="4206240"/>
+            <a:endParaRPr lang="en-US" sz="1800" dirty="0"/>
+          </a:p>
+        </p:txBody>
+      </p:sp>
+      <p:sp>
+        <p:nvSpPr>
+          <p:cNvPr id="6" name="Shape 4"/>
+          <p:cNvSpPr/>
+          <p:nvPr/>
+        </p:nvSpPr>
+        <p:spPr>
+          <a:xfrm>
+            <a:off x="658368" y="5623560"/>
             <a:ext cx="2651760" cy="566928"/>
           </a:xfrm>
           <a:prstGeom prst="roundRect">
@@ -1291,13 +1330,13 @@
       </p:sp>
       <p:sp>
         <p:nvSpPr>
-          <p:cNvPr id="6" name="Text 4"/>
-          <p:cNvSpPr/>
-          <p:nvPr/>
-        </p:nvSpPr>
-        <p:spPr>
-          <a:xfrm>
-            <a:off x="658368" y="4206240"/>
+          <p:cNvPr id="7" name="Text 5"/>
+          <p:cNvSpPr/>
+          <p:nvPr/>
+        </p:nvSpPr>
+        <p:spPr>
+          <a:xfrm>
+            <a:off x="658368" y="5623560"/>
             <a:ext cx="2651760" cy="566928"/>
           </a:xfrm>
           <a:prstGeom prst="rect">
@@ -1314,7 +1353,7 @@
               <a:buNone/>
             </a:pPr>
             <a:r>
-              <a:rPr lang="en-US" sz="1400" b="1" dirty="0">
+              <a:rPr lang="en-US" sz="1350" b="1" dirty="0">
                 <a:solidFill>
                   <a:srgbClr val="E7C24A"/>
                 </a:solidFill>
@@ -1324,19 +1363,19 @@
               </a:rPr>
               <a:t>Health 100→0 · 45–72 °C</a:t>
             </a:r>
-            <a:endParaRPr lang="en-US" sz="1400" dirty="0"/>
-          </a:p>
-        </p:txBody>
-      </p:sp>
-      <p:sp>
-        <p:nvSpPr>
-          <p:cNvPr id="7" name="Shape 5"/>
-          <p:cNvSpPr/>
-          <p:nvPr/>
-        </p:nvSpPr>
-        <p:spPr>
-          <a:xfrm>
-            <a:off x="3538728" y="4206240"/>
+            <a:endParaRPr lang="en-US" sz="1350" dirty="0"/>
+          </a:p>
+        </p:txBody>
+      </p:sp>
+      <p:sp>
+        <p:nvSpPr>
+          <p:cNvPr id="8" name="Shape 6"/>
+          <p:cNvSpPr/>
+          <p:nvPr/>
+        </p:nvSpPr>
+        <p:spPr>
+          <a:xfrm>
+            <a:off x="3538728" y="5623560"/>
             <a:ext cx="2651760" cy="566928"/>
           </a:xfrm>
           <a:prstGeom prst="roundRect">
@@ -1357,13 +1396,13 @@
       </p:sp>
       <p:sp>
         <p:nvSpPr>
-          <p:cNvPr id="8" name="Text 6"/>
-          <p:cNvSpPr/>
-          <p:nvPr/>
-        </p:nvSpPr>
-        <p:spPr>
-          <a:xfrm>
-            <a:off x="3538728" y="4206240"/>
+          <p:cNvPr id="9" name="Text 7"/>
+          <p:cNvSpPr/>
+          <p:nvPr/>
+        </p:nvSpPr>
+        <p:spPr>
+          <a:xfrm>
+            <a:off x="3538728" y="5623560"/>
             <a:ext cx="2651760" cy="566928"/>
           </a:xfrm>
           <a:prstGeom prst="rect">
@@ -1380,7 +1419,7 @@
               <a:buNone/>
             </a:pPr>
             <a:r>
-              <a:rPr lang="en-US" sz="1400" b="1" dirty="0">
+              <a:rPr lang="en-US" sz="1350" b="1" dirty="0">
                 <a:solidFill>
                   <a:srgbClr val="E7C24A"/>
                 </a:solidFill>
@@ -1390,19 +1429,19 @@
               </a:rPr>
               <a:t>Cleaning &gt; 25% soiling</a:t>
             </a:r>
-            <a:endParaRPr lang="en-US" sz="1400" dirty="0"/>
-          </a:p>
-        </p:txBody>
-      </p:sp>
-      <p:sp>
-        <p:nvSpPr>
-          <p:cNvPr id="9" name="Shape 7"/>
-          <p:cNvSpPr/>
-          <p:nvPr/>
-        </p:nvSpPr>
-        <p:spPr>
-          <a:xfrm>
-            <a:off x="6419088" y="4206240"/>
+            <a:endParaRPr lang="en-US" sz="1350" dirty="0"/>
+          </a:p>
+        </p:txBody>
+      </p:sp>
+      <p:sp>
+        <p:nvSpPr>
+          <p:cNvPr id="10" name="Shape 8"/>
+          <p:cNvSpPr/>
+          <p:nvPr/>
+        </p:nvSpPr>
+        <p:spPr>
+          <a:xfrm>
+            <a:off x="6419088" y="5623560"/>
             <a:ext cx="2651760" cy="566928"/>
           </a:xfrm>
           <a:prstGeom prst="roundRect">
@@ -1423,13 +1462,13 @@
       </p:sp>
       <p:sp>
         <p:nvSpPr>
-          <p:cNvPr id="10" name="Text 8"/>
-          <p:cNvSpPr/>
-          <p:nvPr/>
-        </p:nvSpPr>
-        <p:spPr>
-          <a:xfrm>
-            <a:off x="6419088" y="4206240"/>
+          <p:cNvPr id="11" name="Text 9"/>
+          <p:cNvSpPr/>
+          <p:nvPr/>
+        </p:nvSpPr>
+        <p:spPr>
+          <a:xfrm>
+            <a:off x="6419088" y="5623560"/>
             <a:ext cx="2651760" cy="566928"/>
           </a:xfrm>
           <a:prstGeom prst="rect">
@@ -1446,7 +1485,7 @@
               <a:buNone/>
             </a:pPr>
             <a:r>
-              <a:rPr lang="en-US" sz="1400" b="1" dirty="0">
+              <a:rPr lang="en-US" sz="1350" b="1" dirty="0">
                 <a:solidFill>
                   <a:srgbClr val="E7C24A"/>
                 </a:solidFill>
@@ -1456,20 +1495,20 @@
               </a:rPr>
               <a:t>2–5 s sampling</a:t>
             </a:r>
-            <a:endParaRPr lang="en-US" sz="1400" dirty="0"/>
-          </a:p>
-        </p:txBody>
-      </p:sp>
-      <p:sp>
-        <p:nvSpPr>
-          <p:cNvPr id="11" name="Text 9"/>
-          <p:cNvSpPr/>
-          <p:nvPr/>
-        </p:nvSpPr>
-        <p:spPr>
-          <a:xfrm>
-            <a:off x="658368" y="6126480"/>
-            <a:ext cx="10972800" cy="365760"/>
+            <a:endParaRPr lang="en-US" sz="1350" dirty="0"/>
+          </a:p>
+        </p:txBody>
+      </p:sp>
+      <p:sp>
+        <p:nvSpPr>
+          <p:cNvPr id="12" name="Text 10"/>
+          <p:cNvSpPr/>
+          <p:nvPr/>
+        </p:nvSpPr>
+        <p:spPr>
+          <a:xfrm>
+            <a:off x="658368" y="6400800"/>
+            <a:ext cx="10972800" cy="320040"/>
           </a:xfrm>
           <a:prstGeom prst="rect">
             <a:avLst/>
@@ -1485,7 +1524,7 @@
               <a:buNone/>
             </a:pPr>
             <a:r>
-              <a:rPr lang="en-US" sz="1300" dirty="0">
+              <a:rPr lang="en-US" sz="1250" dirty="0">
                 <a:solidFill>
                   <a:srgbClr val="6E6146"/>
                 </a:solidFill>
@@ -1495,7 +1534,7 @@
               </a:rPr>
               <a:t>Fog &amp; Edge Computing (H9FECC)   ·   deployed live on AWS</a:t>
             </a:r>
-            <a:endParaRPr lang="en-US" sz="1300" dirty="0"/>
+            <a:endParaRPr lang="en-US" sz="1250" dirty="0"/>
           </a:p>
         </p:txBody>
       </p:sp>
@@ -1578,12 +1617,12 @@
         </p:nvSpPr>
         <p:spPr>
           <a:xfrm>
-            <a:off x="640080" y="2468880"/>
-            <a:ext cx="1572768" cy="1371600"/>
+            <a:off x="640080" y="1554480"/>
+            <a:ext cx="3200400" cy="3383280"/>
           </a:xfrm>
           <a:prstGeom prst="roundRect">
             <a:avLst>
-              <a:gd name="adj" fmla="val 6667"/>
+              <a:gd name="adj" fmla="val 2857"/>
             </a:avLst>
           </a:prstGeom>
           <a:solidFill>
@@ -1599,146 +1638,63 @@
       </p:sp>
       <p:sp>
         <p:nvSpPr>
-          <p:cNvPr id="4" name="Shape 2"/>
-          <p:cNvSpPr/>
-          <p:nvPr/>
-        </p:nvSpPr>
-        <p:spPr>
-          <a:xfrm>
-            <a:off x="1325880" y="2670048"/>
-            <a:ext cx="201168" cy="201168"/>
-          </a:xfrm>
-          <a:prstGeom prst="ellipse">
-            <a:avLst/>
-          </a:prstGeom>
-          <a:solidFill>
-            <a:srgbClr val="D8A94E"/>
-          </a:solidFill>
-          <a:ln/>
-        </p:spPr>
-      </p:sp>
-      <p:sp>
-        <p:nvSpPr>
-          <p:cNvPr id="5" name="Text 3"/>
-          <p:cNvSpPr/>
-          <p:nvPr/>
-        </p:nvSpPr>
-        <p:spPr>
-          <a:xfrm>
-            <a:off x="594360" y="2926080"/>
-            <a:ext cx="1664208" cy="411480"/>
-          </a:xfrm>
-          <a:prstGeom prst="rect">
-            <a:avLst/>
-          </a:prstGeom>
-          <a:noFill/>
-          <a:ln/>
-        </p:spPr>
-        <p:txBody>
-          <a:bodyPr wrap="square" lIns="0" tIns="0" rIns="0" bIns="0" rtlCol="0" anchor="ctr"/>
+          <p:cNvPr id="4" name="Text 2"/>
+          <p:cNvSpPr/>
+          <p:nvPr/>
+        </p:nvSpPr>
+        <p:spPr>
+          <a:xfrm>
+            <a:off x="640080" y="1691640"/>
+            <a:ext cx="3200400" cy="365760"/>
+          </a:xfrm>
+          <a:prstGeom prst="rect">
+            <a:avLst/>
+          </a:prstGeom>
+          <a:noFill/>
+          <a:ln/>
+        </p:spPr>
+        <p:txBody>
+          <a:bodyPr wrap="square" rtlCol="0" anchor="ctr"/>
           <a:lstStyle/>
           <a:p>
             <a:pPr algn="ctr" indent="0" marL="0">
               <a:buNone/>
             </a:pPr>
             <a:r>
-              <a:rPr lang="en-US" sz="1450" b="1" dirty="0">
-                <a:solidFill>
-                  <a:srgbClr val="281F10"/>
+              <a:rPr lang="en-US" sz="1200" b="1" spc="300" kern="0" dirty="0">
+                <a:solidFill>
+                  <a:srgbClr val="D8A94E"/>
                 </a:solidFill>
                 <a:latin typeface="Calibri" pitchFamily="34" charset="0"/>
                 <a:ea typeface="Calibri" pitchFamily="34" charset="-122"/>
                 <a:cs typeface="Calibri" pitchFamily="34" charset="-120"/>
               </a:rPr>
-              <a:t>Array sensors</a:t>
-            </a:r>
-            <a:endParaRPr lang="en-US" sz="1450" dirty="0"/>
-          </a:p>
-        </p:txBody>
-      </p:sp>
-      <p:sp>
-        <p:nvSpPr>
-          <p:cNvPr id="6" name="Text 4"/>
-          <p:cNvSpPr/>
-          <p:nvPr/>
-        </p:nvSpPr>
-        <p:spPr>
-          <a:xfrm>
-            <a:off x="621792" y="3310128"/>
-            <a:ext cx="1609344" cy="457200"/>
-          </a:xfrm>
-          <a:prstGeom prst="rect">
-            <a:avLst/>
-          </a:prstGeom>
-          <a:noFill/>
-          <a:ln/>
-        </p:spPr>
-        <p:txBody>
-          <a:bodyPr wrap="square" lIns="0" tIns="0" rIns="0" bIns="0" rtlCol="0" anchor="t"/>
-          <a:lstStyle/>
-          <a:p>
-            <a:pPr algn="ctr" indent="0" marL="0">
-              <a:buNone/>
-            </a:pPr>
-            <a:r>
-              <a:rPr lang="en-US" sz="1050" dirty="0">
-                <a:solidFill>
-                  <a:srgbClr val="6E6146"/>
-                </a:solidFill>
-                <a:latin typeface="Calibri" pitchFamily="34" charset="0"/>
-                <a:ea typeface="Calibri" pitchFamily="34" charset="-122"/>
-                <a:cs typeface="Calibri" pitchFamily="34" charset="-120"/>
-              </a:rPr>
-              <a:t>10 · 2 arrays · 5 metrics</a:t>
-            </a:r>
-            <a:endParaRPr lang="en-US" sz="1050" dirty="0"/>
-          </a:p>
-        </p:txBody>
-      </p:sp>
-      <p:sp>
-        <p:nvSpPr>
-          <p:cNvPr id="7" name="Shape 5"/>
-          <p:cNvSpPr/>
-          <p:nvPr/>
-        </p:nvSpPr>
-        <p:spPr>
-          <a:xfrm>
-            <a:off x="2231136" y="3154680"/>
-            <a:ext cx="258409" cy="0"/>
-          </a:xfrm>
-          <a:prstGeom prst="line">
-            <a:avLst/>
-          </a:prstGeom>
-          <a:noFill/>
-          <a:ln w="25400">
-            <a:solidFill>
-              <a:srgbClr val="D8A94E"/>
-            </a:solidFill>
-            <a:prstDash val="solid"/>
-            <a:tailEnd type="triangle"/>
-          </a:ln>
-        </p:spPr>
-      </p:sp>
-      <p:sp>
-        <p:nvSpPr>
-          <p:cNvPr id="8" name="Shape 6"/>
-          <p:cNvSpPr/>
-          <p:nvPr/>
-        </p:nvSpPr>
-        <p:spPr>
-          <a:xfrm>
-            <a:off x="2507833" y="2468880"/>
-            <a:ext cx="1572768" cy="1371600"/>
+              <a:t>EDGE</a:t>
+            </a:r>
+            <a:endParaRPr lang="en-US" sz="1200" dirty="0"/>
+          </a:p>
+        </p:txBody>
+      </p:sp>
+      <p:sp>
+        <p:nvSpPr>
+          <p:cNvPr id="5" name="Shape 3"/>
+          <p:cNvSpPr/>
+          <p:nvPr/>
+        </p:nvSpPr>
+        <p:spPr>
+          <a:xfrm>
+            <a:off x="914400" y="2286000"/>
+            <a:ext cx="2651760" cy="1005840"/>
           </a:xfrm>
           <a:prstGeom prst="roundRect">
             <a:avLst>
-              <a:gd name="adj" fmla="val 6667"/>
+              <a:gd name="adj" fmla="val 7273"/>
             </a:avLst>
           </a:prstGeom>
           <a:solidFill>
-            <a:srgbClr val="F7F1E4"/>
+            <a:srgbClr val="FFFFFF"/>
           </a:solidFill>
-          <a:ln w="19050">
+          <a:ln w="15240">
             <a:solidFill>
               <a:srgbClr val="D8A94E"/>
             </a:solidFill>
@@ -1748,34 +1704,14 @@
       </p:sp>
       <p:sp>
         <p:nvSpPr>
-          <p:cNvPr id="9" name="Shape 7"/>
-          <p:cNvSpPr/>
-          <p:nvPr/>
-        </p:nvSpPr>
-        <p:spPr>
-          <a:xfrm>
-            <a:off x="3193633" y="2670048"/>
-            <a:ext cx="201168" cy="201168"/>
-          </a:xfrm>
-          <a:prstGeom prst="ellipse">
-            <a:avLst/>
-          </a:prstGeom>
-          <a:solidFill>
-            <a:srgbClr val="D8A94E"/>
-          </a:solidFill>
-          <a:ln/>
-        </p:spPr>
-      </p:sp>
-      <p:sp>
-        <p:nvSpPr>
-          <p:cNvPr id="10" name="Text 8"/>
-          <p:cNvSpPr/>
-          <p:nvPr/>
-        </p:nvSpPr>
-        <p:spPr>
-          <a:xfrm>
-            <a:off x="2462113" y="2926080"/>
-            <a:ext cx="1664208" cy="411480"/>
+          <p:cNvPr id="6" name="Text 4"/>
+          <p:cNvSpPr/>
+          <p:nvPr/>
+        </p:nvSpPr>
+        <p:spPr>
+          <a:xfrm>
+            <a:off x="914400" y="2432304"/>
+            <a:ext cx="2651760" cy="365760"/>
           </a:xfrm>
           <a:prstGeom prst="rect">
             <a:avLst/>
@@ -1791,7 +1727,7 @@
               <a:buNone/>
             </a:pPr>
             <a:r>
-              <a:rPr lang="en-US" sz="1450" b="1" dirty="0">
+              <a:rPr lang="en-US" sz="1400" b="1" dirty="0">
                 <a:solidFill>
                   <a:srgbClr val="281F10"/>
                 </a:solidFill>
@@ -1799,38 +1735,38 @@
                 <a:ea typeface="Calibri" pitchFamily="34" charset="-122"/>
                 <a:cs typeface="Calibri" pitchFamily="34" charset="-120"/>
               </a:rPr>
-              <a:t>Fog node</a:t>
-            </a:r>
-            <a:endParaRPr lang="en-US" sz="1450" dirty="0"/>
-          </a:p>
-        </p:txBody>
-      </p:sp>
-      <p:sp>
-        <p:nvSpPr>
-          <p:cNvPr id="11" name="Text 9"/>
-          <p:cNvSpPr/>
-          <p:nvPr/>
-        </p:nvSpPr>
-        <p:spPr>
-          <a:xfrm>
-            <a:off x="2489545" y="3310128"/>
-            <a:ext cx="1609344" cy="457200"/>
-          </a:xfrm>
-          <a:prstGeom prst="rect">
-            <a:avLst/>
-          </a:prstGeom>
-          <a:noFill/>
-          <a:ln/>
-        </p:spPr>
-        <p:txBody>
-          <a:bodyPr wrap="square" lIns="0" tIns="0" rIns="0" bIns="0" rtlCol="0" anchor="t"/>
+              <a:t>Array sensors</a:t>
+            </a:r>
+            <a:endParaRPr lang="en-US" sz="1400" dirty="0"/>
+          </a:p>
+        </p:txBody>
+      </p:sp>
+      <p:sp>
+        <p:nvSpPr>
+          <p:cNvPr id="7" name="Text 5"/>
+          <p:cNvSpPr/>
+          <p:nvPr/>
+        </p:nvSpPr>
+        <p:spPr>
+          <a:xfrm>
+            <a:off x="914400" y="2816352"/>
+            <a:ext cx="2651760" cy="365760"/>
+          </a:xfrm>
+          <a:prstGeom prst="rect">
+            <a:avLst/>
+          </a:prstGeom>
+          <a:noFill/>
+          <a:ln/>
+        </p:spPr>
+        <p:txBody>
+          <a:bodyPr wrap="square" lIns="0" tIns="0" rIns="0" bIns="0" rtlCol="0" anchor="ctr"/>
           <a:lstStyle/>
           <a:p>
             <a:pPr algn="ctr" indent="0" marL="0">
               <a:buNone/>
             </a:pPr>
             <a:r>
-              <a:rPr lang="en-US" sz="1050" dirty="0">
+              <a:rPr lang="en-US" sz="1000" dirty="0">
                 <a:solidFill>
                   <a:srgbClr val="6E6146"/>
                 </a:solidFill>
@@ -1838,50 +1774,155 @@
                 <a:ea typeface="Calibri" pitchFamily="34" charset="-122"/>
                 <a:cs typeface="Calibri" pitchFamily="34" charset="-120"/>
               </a:rPr>
-              <a:t>windows · alerts</a:t>
-            </a:r>
-            <a:endParaRPr lang="en-US" sz="1050" dirty="0"/>
-          </a:p>
-        </p:txBody>
-      </p:sp>
-      <p:sp>
-        <p:nvSpPr>
-          <p:cNvPr id="12" name="Shape 10"/>
-          <p:cNvSpPr/>
-          <p:nvPr/>
-        </p:nvSpPr>
-        <p:spPr>
-          <a:xfrm>
-            <a:off x="4098889" y="3154680"/>
-            <a:ext cx="258409" cy="0"/>
-          </a:xfrm>
-          <a:prstGeom prst="line">
-            <a:avLst/>
-          </a:prstGeom>
-          <a:noFill/>
-          <a:ln w="25400">
+              <a:t>10 · 2 arrays · 5 metrics</a:t>
+            </a:r>
+            <a:endParaRPr lang="en-US" sz="1000" dirty="0"/>
+          </a:p>
+        </p:txBody>
+      </p:sp>
+      <p:sp>
+        <p:nvSpPr>
+          <p:cNvPr id="8" name="Shape 6"/>
+          <p:cNvSpPr/>
+          <p:nvPr/>
+        </p:nvSpPr>
+        <p:spPr>
+          <a:xfrm>
+            <a:off x="914400" y="3520440"/>
+            <a:ext cx="2651760" cy="1005840"/>
+          </a:xfrm>
+          <a:prstGeom prst="roundRect">
+            <a:avLst>
+              <a:gd name="adj" fmla="val 7273"/>
+            </a:avLst>
+          </a:prstGeom>
+          <a:solidFill>
+            <a:srgbClr val="FFFFFF"/>
+          </a:solidFill>
+          <a:ln w="15240">
             <a:solidFill>
               <a:srgbClr val="D8A94E"/>
             </a:solidFill>
             <a:prstDash val="solid"/>
+          </a:ln>
+        </p:spPr>
+      </p:sp>
+      <p:sp>
+        <p:nvSpPr>
+          <p:cNvPr id="9" name="Text 7"/>
+          <p:cNvSpPr/>
+          <p:nvPr/>
+        </p:nvSpPr>
+        <p:spPr>
+          <a:xfrm>
+            <a:off x="914400" y="3666744"/>
+            <a:ext cx="2651760" cy="365760"/>
+          </a:xfrm>
+          <a:prstGeom prst="rect">
+            <a:avLst/>
+          </a:prstGeom>
+          <a:noFill/>
+          <a:ln/>
+        </p:spPr>
+        <p:txBody>
+          <a:bodyPr wrap="square" lIns="0" tIns="0" rIns="0" bIns="0" rtlCol="0" anchor="ctr"/>
+          <a:lstStyle/>
+          <a:p>
+            <a:pPr algn="ctr" indent="0" marL="0">
+              <a:buNone/>
+            </a:pPr>
+            <a:r>
+              <a:rPr lang="en-US" sz="1400" b="1" dirty="0">
+                <a:solidFill>
+                  <a:srgbClr val="281F10"/>
+                </a:solidFill>
+                <a:latin typeface="Calibri" pitchFamily="34" charset="0"/>
+                <a:ea typeface="Calibri" pitchFamily="34" charset="-122"/>
+                <a:cs typeface="Calibri" pitchFamily="34" charset="-120"/>
+              </a:rPr>
+              <a:t>Fog node</a:t>
+            </a:r>
+            <a:endParaRPr lang="en-US" sz="1400" dirty="0"/>
+          </a:p>
+        </p:txBody>
+      </p:sp>
+      <p:sp>
+        <p:nvSpPr>
+          <p:cNvPr id="10" name="Text 8"/>
+          <p:cNvSpPr/>
+          <p:nvPr/>
+        </p:nvSpPr>
+        <p:spPr>
+          <a:xfrm>
+            <a:off x="914400" y="4050792"/>
+            <a:ext cx="2651760" cy="365760"/>
+          </a:xfrm>
+          <a:prstGeom prst="rect">
+            <a:avLst/>
+          </a:prstGeom>
+          <a:noFill/>
+          <a:ln/>
+        </p:spPr>
+        <p:txBody>
+          <a:bodyPr wrap="square" lIns="0" tIns="0" rIns="0" bIns="0" rtlCol="0" anchor="ctr"/>
+          <a:lstStyle/>
+          <a:p>
+            <a:pPr algn="ctr" indent="0" marL="0">
+              <a:buNone/>
+            </a:pPr>
+            <a:r>
+              <a:rPr lang="en-US" sz="1000" dirty="0">
+                <a:solidFill>
+                  <a:srgbClr val="6E6146"/>
+                </a:solidFill>
+                <a:latin typeface="Calibri" pitchFamily="34" charset="0"/>
+                <a:ea typeface="Calibri" pitchFamily="34" charset="-122"/>
+                <a:cs typeface="Calibri" pitchFamily="34" charset="-120"/>
+              </a:rPr>
+              <a:t>windows · alerts</a:t>
+            </a:r>
+            <a:endParaRPr lang="en-US" sz="1000" dirty="0"/>
+          </a:p>
+        </p:txBody>
+      </p:sp>
+      <p:sp>
+        <p:nvSpPr>
+          <p:cNvPr id="11" name="Shape 9"/>
+          <p:cNvSpPr/>
+          <p:nvPr/>
+        </p:nvSpPr>
+        <p:spPr>
+          <a:xfrm>
+            <a:off x="3886200" y="3246120"/>
+            <a:ext cx="502920" cy="0"/>
+          </a:xfrm>
+          <a:prstGeom prst="line">
+            <a:avLst/>
+          </a:prstGeom>
+          <a:noFill/>
+          <a:ln w="31750">
+            <a:solidFill>
+              <a:srgbClr val="8A5A16"/>
+            </a:solidFill>
+            <a:prstDash val="solid"/>
             <a:tailEnd type="triangle"/>
           </a:ln>
         </p:spPr>
       </p:sp>
       <p:sp>
         <p:nvSpPr>
-          <p:cNvPr id="13" name="Shape 11"/>
-          <p:cNvSpPr/>
-          <p:nvPr/>
-        </p:nvSpPr>
-        <p:spPr>
-          <a:xfrm>
-            <a:off x="4375587" y="2468880"/>
-            <a:ext cx="1572768" cy="1371600"/>
+          <p:cNvPr id="12" name="Shape 10"/>
+          <p:cNvSpPr/>
+          <p:nvPr/>
+        </p:nvSpPr>
+        <p:spPr>
+          <a:xfrm>
+            <a:off x="4572000" y="1554480"/>
+            <a:ext cx="6949440" cy="3383280"/>
           </a:xfrm>
           <a:prstGeom prst="roundRect">
             <a:avLst>
-              <a:gd name="adj" fmla="val 6667"/>
+              <a:gd name="adj" fmla="val 2703"/>
             </a:avLst>
           </a:prstGeom>
           <a:solidFill>
@@ -1897,99 +1938,145 @@
       </p:sp>
       <p:sp>
         <p:nvSpPr>
-          <p:cNvPr id="14" name="Shape 12"/>
-          <p:cNvSpPr/>
-          <p:nvPr/>
-        </p:nvSpPr>
-        <p:spPr>
-          <a:xfrm>
-            <a:off x="5061387" y="2670048"/>
-            <a:ext cx="201168" cy="201168"/>
-          </a:xfrm>
-          <a:prstGeom prst="ellipse">
-            <a:avLst/>
-          </a:prstGeom>
-          <a:solidFill>
-            <a:srgbClr val="8A5A16"/>
-          </a:solidFill>
-          <a:ln/>
-        </p:spPr>
-      </p:sp>
-      <p:sp>
-        <p:nvSpPr>
-          <p:cNvPr id="15" name="Text 13"/>
-          <p:cNvSpPr/>
-          <p:nvPr/>
-        </p:nvSpPr>
-        <p:spPr>
-          <a:xfrm>
-            <a:off x="4329867" y="2926080"/>
-            <a:ext cx="1664208" cy="411480"/>
-          </a:xfrm>
-          <a:prstGeom prst="rect">
-            <a:avLst/>
-          </a:prstGeom>
-          <a:noFill/>
-          <a:ln/>
-        </p:spPr>
-        <p:txBody>
-          <a:bodyPr wrap="square" lIns="0" tIns="0" rIns="0" bIns="0" rtlCol="0" anchor="ctr"/>
+          <p:cNvPr id="13" name="Text 11"/>
+          <p:cNvSpPr/>
+          <p:nvPr/>
+        </p:nvSpPr>
+        <p:spPr>
+          <a:xfrm>
+            <a:off x="4572000" y="1691640"/>
+            <a:ext cx="6949440" cy="365760"/>
+          </a:xfrm>
+          <a:prstGeom prst="rect">
+            <a:avLst/>
+          </a:prstGeom>
+          <a:noFill/>
+          <a:ln/>
+        </p:spPr>
+        <p:txBody>
+          <a:bodyPr wrap="square" rtlCol="0" anchor="ctr"/>
           <a:lstStyle/>
           <a:p>
             <a:pPr algn="ctr" indent="0" marL="0">
               <a:buNone/>
             </a:pPr>
             <a:r>
-              <a:rPr lang="en-US" sz="1450" b="1" dirty="0">
-                <a:solidFill>
-                  <a:srgbClr val="281F10"/>
+              <a:rPr lang="en-US" sz="1200" b="1" spc="200" kern="0" dirty="0">
+                <a:solidFill>
+                  <a:srgbClr val="8A5A16"/>
                 </a:solidFill>
                 <a:latin typeface="Calibri" pitchFamily="34" charset="0"/>
                 <a:ea typeface="Calibri" pitchFamily="34" charset="-122"/>
                 <a:cs typeface="Calibri" pitchFamily="34" charset="-120"/>
               </a:rPr>
-              <a:t>Amazon SQS</a:t>
-            </a:r>
-            <a:endParaRPr lang="en-US" sz="1450" dirty="0"/>
-          </a:p>
-        </p:txBody>
-      </p:sp>
-      <p:sp>
-        <p:nvSpPr>
-          <p:cNvPr id="16" name="Text 14"/>
-          <p:cNvSpPr/>
-          <p:nvPr/>
-        </p:nvSpPr>
-        <p:spPr>
-          <a:xfrm>
-            <a:off x="4357299" y="3310128"/>
-            <a:ext cx="1609344" cy="457200"/>
-          </a:xfrm>
-          <a:prstGeom prst="rect">
-            <a:avLst/>
-          </a:prstGeom>
-          <a:noFill/>
-          <a:ln/>
-        </p:spPr>
-        <p:txBody>
-          <a:bodyPr wrap="square" lIns="0" tIns="0" rIns="0" bIns="0" rtlCol="0" anchor="t"/>
+              <a:t>CLOUD (serverless)</a:t>
+            </a:r>
+            <a:endParaRPr lang="en-US" sz="1200" dirty="0"/>
+          </a:p>
+        </p:txBody>
+      </p:sp>
+      <p:sp>
+        <p:nvSpPr>
+          <p:cNvPr id="14" name="Shape 12"/>
+          <p:cNvSpPr/>
+          <p:nvPr/>
+        </p:nvSpPr>
+        <p:spPr>
+          <a:xfrm>
+            <a:off x="4846320" y="2651760"/>
+            <a:ext cx="1463040" cy="1371600"/>
+          </a:xfrm>
+          <a:prstGeom prst="roundRect">
+            <a:avLst>
+              <a:gd name="adj" fmla="val 5333"/>
+            </a:avLst>
+          </a:prstGeom>
+          <a:solidFill>
+            <a:srgbClr val="FFFFFF"/>
+          </a:solidFill>
+          <a:ln w="15240">
+            <a:solidFill>
+              <a:srgbClr val="8A5A16"/>
+            </a:solidFill>
+            <a:prstDash val="solid"/>
+          </a:ln>
+        </p:spPr>
+      </p:sp>
+      <p:sp>
+        <p:nvSpPr>
+          <p:cNvPr id="15" name="Text 13"/>
+          <p:cNvSpPr/>
+          <p:nvPr/>
+        </p:nvSpPr>
+        <p:spPr>
+          <a:xfrm>
+            <a:off x="4800600" y="2907792"/>
+            <a:ext cx="1554480" cy="457200"/>
+          </a:xfrm>
+          <a:prstGeom prst="rect">
+            <a:avLst/>
+          </a:prstGeom>
+          <a:noFill/>
+          <a:ln/>
+        </p:spPr>
+        <p:txBody>
+          <a:bodyPr wrap="square" lIns="0" tIns="0" rIns="0" bIns="0" rtlCol="0" anchor="ctr"/>
           <a:lstStyle/>
           <a:p>
             <a:pPr algn="ctr" indent="0" marL="0">
               <a:buNone/>
             </a:pPr>
             <a:r>
-              <a:rPr lang="en-US" sz="1050" dirty="0">
-                <a:solidFill>
-                  <a:srgbClr val="6E6146"/>
+              <a:rPr lang="en-US" sz="1250" b="1" dirty="0">
+                <a:solidFill>
+                  <a:srgbClr val="281F10"/>
                 </a:solidFill>
                 <a:latin typeface="Calibri" pitchFamily="34" charset="0"/>
                 <a:ea typeface="Calibri" pitchFamily="34" charset="-122"/>
                 <a:cs typeface="Calibri" pitchFamily="34" charset="-120"/>
               </a:rPr>
+              <a:t>Amazon SQS</a:t>
+            </a:r>
+            <a:endParaRPr lang="en-US" sz="1250" dirty="0"/>
+          </a:p>
+        </p:txBody>
+      </p:sp>
+      <p:sp>
+        <p:nvSpPr>
+          <p:cNvPr id="16" name="Text 14"/>
+          <p:cNvSpPr/>
+          <p:nvPr/>
+        </p:nvSpPr>
+        <p:spPr>
+          <a:xfrm>
+            <a:off x="4828032" y="3401568"/>
+            <a:ext cx="1499616" cy="457200"/>
+          </a:xfrm>
+          <a:prstGeom prst="rect">
+            <a:avLst/>
+          </a:prstGeom>
+          <a:noFill/>
+          <a:ln/>
+        </p:spPr>
+        <p:txBody>
+          <a:bodyPr wrap="square" lIns="0" tIns="0" rIns="0" bIns="0" rtlCol="0" anchor="ctr"/>
+          <a:lstStyle/>
+          <a:p>
+            <a:pPr algn="ctr" indent="0" marL="0">
+              <a:buNone/>
+            </a:pPr>
+            <a:r>
+              <a:rPr lang="en-US" sz="900" dirty="0">
+                <a:solidFill>
+                  <a:srgbClr val="6E6146"/>
+                </a:solidFill>
+                <a:latin typeface="Calibri" pitchFamily="34" charset="0"/>
+                <a:ea typeface="Calibri" pitchFamily="34" charset="-122"/>
+                <a:cs typeface="Calibri" pitchFamily="34" charset="-120"/>
+              </a:rPr>
               <a:t>window summaries</a:t>
             </a:r>
-            <a:endParaRPr lang="en-US" sz="1050" dirty="0"/>
+            <a:endParaRPr lang="en-US" sz="900" dirty="0"/>
           </a:p>
         </p:txBody>
       </p:sp>
@@ -2001,14 +2088,14 @@
         </p:nvSpPr>
         <p:spPr>
           <a:xfrm>
-            <a:off x="5966643" y="3154680"/>
-            <a:ext cx="258409" cy="0"/>
+            <a:off x="6318504" y="3337560"/>
+            <a:ext cx="164592" cy="0"/>
           </a:xfrm>
           <a:prstGeom prst="line">
             <a:avLst/>
           </a:prstGeom>
           <a:noFill/>
-          <a:ln w="25400">
+          <a:ln w="20320">
             <a:solidFill>
               <a:srgbClr val="D8A94E"/>
             </a:solidFill>
@@ -2025,18 +2112,18 @@
         </p:nvSpPr>
         <p:spPr>
           <a:xfrm>
-            <a:off x="6243340" y="2468880"/>
-            <a:ext cx="1572768" cy="1371600"/>
+            <a:off x="6492240" y="2651760"/>
+            <a:ext cx="1463040" cy="1371600"/>
           </a:xfrm>
           <a:prstGeom prst="roundRect">
             <a:avLst>
-              <a:gd name="adj" fmla="val 6667"/>
+              <a:gd name="adj" fmla="val 5333"/>
             </a:avLst>
           </a:prstGeom>
           <a:solidFill>
-            <a:srgbClr val="F7F1E4"/>
+            <a:srgbClr val="FFFFFF"/>
           </a:solidFill>
-          <a:ln w="19050">
+          <a:ln w="15240">
             <a:solidFill>
               <a:srgbClr val="8A5A16"/>
             </a:solidFill>
@@ -2046,34 +2133,14 @@
       </p:sp>
       <p:sp>
         <p:nvSpPr>
-          <p:cNvPr id="19" name="Shape 17"/>
-          <p:cNvSpPr/>
-          <p:nvPr/>
-        </p:nvSpPr>
-        <p:spPr>
-          <a:xfrm>
-            <a:off x="6929140" y="2670048"/>
-            <a:ext cx="201168" cy="201168"/>
-          </a:xfrm>
-          <a:prstGeom prst="ellipse">
-            <a:avLst/>
-          </a:prstGeom>
-          <a:solidFill>
-            <a:srgbClr val="8A5A16"/>
-          </a:solidFill>
-          <a:ln/>
-        </p:spPr>
-      </p:sp>
-      <p:sp>
-        <p:nvSpPr>
-          <p:cNvPr id="20" name="Text 18"/>
-          <p:cNvSpPr/>
-          <p:nvPr/>
-        </p:nvSpPr>
-        <p:spPr>
-          <a:xfrm>
-            <a:off x="6197620" y="2926080"/>
-            <a:ext cx="1664208" cy="411480"/>
+          <p:cNvPr id="19" name="Text 17"/>
+          <p:cNvSpPr/>
+          <p:nvPr/>
+        </p:nvSpPr>
+        <p:spPr>
+          <a:xfrm>
+            <a:off x="6446520" y="2907792"/>
+            <a:ext cx="1554480" cy="457200"/>
           </a:xfrm>
           <a:prstGeom prst="rect">
             <a:avLst/>
@@ -2089,7 +2156,7 @@
               <a:buNone/>
             </a:pPr>
             <a:r>
-              <a:rPr lang="en-US" sz="1450" b="1" dirty="0">
+              <a:rPr lang="en-US" sz="1250" b="1" dirty="0">
                 <a:solidFill>
                   <a:srgbClr val="281F10"/>
                 </a:solidFill>
@@ -2099,36 +2166,36 @@
               </a:rPr>
               <a:t>AWS Lambda</a:t>
             </a:r>
-            <a:endParaRPr lang="en-US" sz="1450" dirty="0"/>
-          </a:p>
-        </p:txBody>
-      </p:sp>
-      <p:sp>
-        <p:nvSpPr>
-          <p:cNvPr id="21" name="Text 19"/>
-          <p:cNvSpPr/>
-          <p:nvPr/>
-        </p:nvSpPr>
-        <p:spPr>
-          <a:xfrm>
-            <a:off x="6225052" y="3310128"/>
-            <a:ext cx="1609344" cy="457200"/>
-          </a:xfrm>
-          <a:prstGeom prst="rect">
-            <a:avLst/>
-          </a:prstGeom>
-          <a:noFill/>
-          <a:ln/>
-        </p:spPr>
-        <p:txBody>
-          <a:bodyPr wrap="square" lIns="0" tIns="0" rIns="0" bIns="0" rtlCol="0" anchor="t"/>
+            <a:endParaRPr lang="en-US" sz="1250" dirty="0"/>
+          </a:p>
+        </p:txBody>
+      </p:sp>
+      <p:sp>
+        <p:nvSpPr>
+          <p:cNvPr id="20" name="Text 18"/>
+          <p:cNvSpPr/>
+          <p:nvPr/>
+        </p:nvSpPr>
+        <p:spPr>
+          <a:xfrm>
+            <a:off x="6473952" y="3401568"/>
+            <a:ext cx="1499616" cy="457200"/>
+          </a:xfrm>
+          <a:prstGeom prst="rect">
+            <a:avLst/>
+          </a:prstGeom>
+          <a:noFill/>
+          <a:ln/>
+        </p:spPr>
+        <p:txBody>
+          <a:bodyPr wrap="square" lIns="0" tIns="0" rIns="0" bIns="0" rtlCol="0" anchor="ctr"/>
           <a:lstStyle/>
           <a:p>
             <a:pPr algn="ctr" indent="0" marL="0">
               <a:buNone/>
             </a:pPr>
             <a:r>
-              <a:rPr lang="en-US" sz="1050" dirty="0">
+              <a:rPr lang="en-US" sz="900" dirty="0">
                 <a:solidFill>
                   <a:srgbClr val="6E6146"/>
                 </a:solidFill>
@@ -2138,26 +2205,26 @@
               </a:rPr>
               <a:t>python3.12 ingest</a:t>
             </a:r>
-            <a:endParaRPr lang="en-US" sz="1050" dirty="0"/>
-          </a:p>
-        </p:txBody>
-      </p:sp>
-      <p:sp>
-        <p:nvSpPr>
-          <p:cNvPr id="22" name="Shape 20"/>
-          <p:cNvSpPr/>
-          <p:nvPr/>
-        </p:nvSpPr>
-        <p:spPr>
-          <a:xfrm>
-            <a:off x="7834396" y="3154680"/>
-            <a:ext cx="258409" cy="0"/>
+            <a:endParaRPr lang="en-US" sz="900" dirty="0"/>
+          </a:p>
+        </p:txBody>
+      </p:sp>
+      <p:sp>
+        <p:nvSpPr>
+          <p:cNvPr id="21" name="Shape 19"/>
+          <p:cNvSpPr/>
+          <p:nvPr/>
+        </p:nvSpPr>
+        <p:spPr>
+          <a:xfrm>
+            <a:off x="7964424" y="3337560"/>
+            <a:ext cx="164592" cy="0"/>
           </a:xfrm>
           <a:prstGeom prst="line">
             <a:avLst/>
           </a:prstGeom>
           <a:noFill/>
-          <a:ln w="25400">
+          <a:ln w="20320">
             <a:solidFill>
               <a:srgbClr val="D8A94E"/>
             </a:solidFill>
@@ -2168,24 +2235,24 @@
       </p:sp>
       <p:sp>
         <p:nvSpPr>
-          <p:cNvPr id="23" name="Shape 21"/>
-          <p:cNvSpPr/>
-          <p:nvPr/>
-        </p:nvSpPr>
-        <p:spPr>
-          <a:xfrm>
-            <a:off x="8111094" y="2468880"/>
-            <a:ext cx="1572768" cy="1371600"/>
+          <p:cNvPr id="22" name="Shape 20"/>
+          <p:cNvSpPr/>
+          <p:nvPr/>
+        </p:nvSpPr>
+        <p:spPr>
+          <a:xfrm>
+            <a:off x="8138160" y="2651760"/>
+            <a:ext cx="1463040" cy="1371600"/>
           </a:xfrm>
           <a:prstGeom prst="roundRect">
             <a:avLst>
-              <a:gd name="adj" fmla="val 6667"/>
+              <a:gd name="adj" fmla="val 5333"/>
             </a:avLst>
           </a:prstGeom>
           <a:solidFill>
-            <a:srgbClr val="F7F1E4"/>
+            <a:srgbClr val="FFFFFF"/>
           </a:solidFill>
-          <a:ln w="19050">
+          <a:ln w="15240">
             <a:solidFill>
               <a:srgbClr val="8A5A16"/>
             </a:solidFill>
@@ -2195,34 +2262,14 @@
       </p:sp>
       <p:sp>
         <p:nvSpPr>
-          <p:cNvPr id="24" name="Shape 22"/>
-          <p:cNvSpPr/>
-          <p:nvPr/>
-        </p:nvSpPr>
-        <p:spPr>
-          <a:xfrm>
-            <a:off x="8796894" y="2670048"/>
-            <a:ext cx="201168" cy="201168"/>
-          </a:xfrm>
-          <a:prstGeom prst="ellipse">
-            <a:avLst/>
-          </a:prstGeom>
-          <a:solidFill>
-            <a:srgbClr val="8A5A16"/>
-          </a:solidFill>
-          <a:ln/>
-        </p:spPr>
-      </p:sp>
-      <p:sp>
-        <p:nvSpPr>
-          <p:cNvPr id="25" name="Text 23"/>
-          <p:cNvSpPr/>
-          <p:nvPr/>
-        </p:nvSpPr>
-        <p:spPr>
-          <a:xfrm>
-            <a:off x="8065374" y="2926080"/>
-            <a:ext cx="1664208" cy="411480"/>
+          <p:cNvPr id="23" name="Text 21"/>
+          <p:cNvSpPr/>
+          <p:nvPr/>
+        </p:nvSpPr>
+        <p:spPr>
+          <a:xfrm>
+            <a:off x="8092440" y="2907792"/>
+            <a:ext cx="1554480" cy="457200"/>
           </a:xfrm>
           <a:prstGeom prst="rect">
             <a:avLst/>
@@ -2238,7 +2285,7 @@
               <a:buNone/>
             </a:pPr>
             <a:r>
-              <a:rPr lang="en-US" sz="1450" b="1" dirty="0">
+              <a:rPr lang="en-US" sz="1250" b="1" dirty="0">
                 <a:solidFill>
                   <a:srgbClr val="281F10"/>
                 </a:solidFill>
@@ -2248,36 +2295,36 @@
               </a:rPr>
               <a:t>DynamoDB</a:t>
             </a:r>
-            <a:endParaRPr lang="en-US" sz="1450" dirty="0"/>
-          </a:p>
-        </p:txBody>
-      </p:sp>
-      <p:sp>
-        <p:nvSpPr>
-          <p:cNvPr id="26" name="Text 24"/>
-          <p:cNvSpPr/>
-          <p:nvPr/>
-        </p:nvSpPr>
-        <p:spPr>
-          <a:xfrm>
-            <a:off x="8092806" y="3310128"/>
-            <a:ext cx="1609344" cy="457200"/>
-          </a:xfrm>
-          <a:prstGeom prst="rect">
-            <a:avLst/>
-          </a:prstGeom>
-          <a:noFill/>
-          <a:ln/>
-        </p:spPr>
-        <p:txBody>
-          <a:bodyPr wrap="square" lIns="0" tIns="0" rIns="0" bIns="0" rtlCol="0" anchor="t"/>
+            <a:endParaRPr lang="en-US" sz="1250" dirty="0"/>
+          </a:p>
+        </p:txBody>
+      </p:sp>
+      <p:sp>
+        <p:nvSpPr>
+          <p:cNvPr id="24" name="Text 22"/>
+          <p:cNvSpPr/>
+          <p:nvPr/>
+        </p:nvSpPr>
+        <p:spPr>
+          <a:xfrm>
+            <a:off x="8119872" y="3401568"/>
+            <a:ext cx="1499616" cy="457200"/>
+          </a:xfrm>
+          <a:prstGeom prst="rect">
+            <a:avLst/>
+          </a:prstGeom>
+          <a:noFill/>
+          <a:ln/>
+        </p:spPr>
+        <p:txBody>
+          <a:bodyPr wrap="square" lIns="0" tIns="0" rIns="0" bIns="0" rtlCol="0" anchor="ctr"/>
           <a:lstStyle/>
           <a:p>
             <a:pPr algn="ctr" indent="0" marL="0">
               <a:buNone/>
             </a:pPr>
             <a:r>
-              <a:rPr lang="en-US" sz="1050" dirty="0">
+              <a:rPr lang="en-US" sz="900" dirty="0">
                 <a:solidFill>
                   <a:srgbClr val="6E6146"/>
                 </a:solidFill>
@@ -2287,26 +2334,26 @@
               </a:rPr>
               <a:t>by array · sensor</a:t>
             </a:r>
-            <a:endParaRPr lang="en-US" sz="1050" dirty="0"/>
-          </a:p>
-        </p:txBody>
-      </p:sp>
-      <p:sp>
-        <p:nvSpPr>
-          <p:cNvPr id="27" name="Shape 25"/>
-          <p:cNvSpPr/>
-          <p:nvPr/>
-        </p:nvSpPr>
-        <p:spPr>
-          <a:xfrm>
-            <a:off x="9702150" y="3154680"/>
-            <a:ext cx="258409" cy="0"/>
+            <a:endParaRPr lang="en-US" sz="900" dirty="0"/>
+          </a:p>
+        </p:txBody>
+      </p:sp>
+      <p:sp>
+        <p:nvSpPr>
+          <p:cNvPr id="25" name="Shape 23"/>
+          <p:cNvSpPr/>
+          <p:nvPr/>
+        </p:nvSpPr>
+        <p:spPr>
+          <a:xfrm>
+            <a:off x="9610344" y="3337560"/>
+            <a:ext cx="164592" cy="0"/>
           </a:xfrm>
           <a:prstGeom prst="line">
             <a:avLst/>
           </a:prstGeom>
           <a:noFill/>
-          <a:ln w="25400">
+          <a:ln w="20320">
             <a:solidFill>
               <a:srgbClr val="D8A94E"/>
             </a:solidFill>
@@ -2317,24 +2364,24 @@
       </p:sp>
       <p:sp>
         <p:nvSpPr>
-          <p:cNvPr id="28" name="Shape 26"/>
-          <p:cNvSpPr/>
-          <p:nvPr/>
-        </p:nvSpPr>
-        <p:spPr>
-          <a:xfrm>
-            <a:off x="9978847" y="2468880"/>
-            <a:ext cx="1572768" cy="1371600"/>
+          <p:cNvPr id="26" name="Shape 24"/>
+          <p:cNvSpPr/>
+          <p:nvPr/>
+        </p:nvSpPr>
+        <p:spPr>
+          <a:xfrm>
+            <a:off x="9784080" y="2651760"/>
+            <a:ext cx="1463040" cy="1371600"/>
           </a:xfrm>
           <a:prstGeom prst="roundRect">
             <a:avLst>
-              <a:gd name="adj" fmla="val 6667"/>
+              <a:gd name="adj" fmla="val 5333"/>
             </a:avLst>
           </a:prstGeom>
           <a:solidFill>
-            <a:srgbClr val="F7F1E4"/>
+            <a:srgbClr val="FFFFFF"/>
           </a:solidFill>
-          <a:ln w="19050">
+          <a:ln w="15240">
             <a:solidFill>
               <a:srgbClr val="B9822A"/>
             </a:solidFill>
@@ -2344,34 +2391,14 @@
       </p:sp>
       <p:sp>
         <p:nvSpPr>
-          <p:cNvPr id="29" name="Shape 27"/>
-          <p:cNvSpPr/>
-          <p:nvPr/>
-        </p:nvSpPr>
-        <p:spPr>
-          <a:xfrm>
-            <a:off x="10664647" y="2670048"/>
-            <a:ext cx="201168" cy="201168"/>
-          </a:xfrm>
-          <a:prstGeom prst="ellipse">
-            <a:avLst/>
-          </a:prstGeom>
-          <a:solidFill>
-            <a:srgbClr val="B9822A"/>
-          </a:solidFill>
-          <a:ln/>
-        </p:spPr>
-      </p:sp>
-      <p:sp>
-        <p:nvSpPr>
-          <p:cNvPr id="30" name="Text 28"/>
-          <p:cNvSpPr/>
-          <p:nvPr/>
-        </p:nvSpPr>
-        <p:spPr>
-          <a:xfrm>
-            <a:off x="9933127" y="2926080"/>
-            <a:ext cx="1664208" cy="411480"/>
+          <p:cNvPr id="27" name="Text 25"/>
+          <p:cNvSpPr/>
+          <p:nvPr/>
+        </p:nvSpPr>
+        <p:spPr>
+          <a:xfrm>
+            <a:off x="9738360" y="2907792"/>
+            <a:ext cx="1554480" cy="457200"/>
           </a:xfrm>
           <a:prstGeom prst="rect">
             <a:avLst/>
@@ -2387,7 +2414,7 @@
               <a:buNone/>
             </a:pPr>
             <a:r>
-              <a:rPr lang="en-US" sz="1450" b="1" dirty="0">
+              <a:rPr lang="en-US" sz="1250" b="1" dirty="0">
                 <a:solidFill>
                   <a:srgbClr val="281F10"/>
                 </a:solidFill>
@@ -2397,36 +2424,36 @@
               </a:rPr>
               <a:t>API GW + S3</a:t>
             </a:r>
-            <a:endParaRPr lang="en-US" sz="1450" dirty="0"/>
-          </a:p>
-        </p:txBody>
-      </p:sp>
-      <p:sp>
-        <p:nvSpPr>
-          <p:cNvPr id="31" name="Text 29"/>
-          <p:cNvSpPr/>
-          <p:nvPr/>
-        </p:nvSpPr>
-        <p:spPr>
-          <a:xfrm>
-            <a:off x="9960559" y="3310128"/>
-            <a:ext cx="1609344" cy="457200"/>
-          </a:xfrm>
-          <a:prstGeom prst="rect">
-            <a:avLst/>
-          </a:prstGeom>
-          <a:noFill/>
-          <a:ln/>
-        </p:spPr>
-        <p:txBody>
-          <a:bodyPr wrap="square" lIns="0" tIns="0" rIns="0" bIns="0" rtlCol="0" anchor="t"/>
+            <a:endParaRPr lang="en-US" sz="1250" dirty="0"/>
+          </a:p>
+        </p:txBody>
+      </p:sp>
+      <p:sp>
+        <p:nvSpPr>
+          <p:cNvPr id="28" name="Text 26"/>
+          <p:cNvSpPr/>
+          <p:nvPr/>
+        </p:nvSpPr>
+        <p:spPr>
+          <a:xfrm>
+            <a:off x="9765792" y="3401568"/>
+            <a:ext cx="1499616" cy="457200"/>
+          </a:xfrm>
+          <a:prstGeom prst="rect">
+            <a:avLst/>
+          </a:prstGeom>
+          <a:noFill/>
+          <a:ln/>
+        </p:spPr>
+        <p:txBody>
+          <a:bodyPr wrap="square" lIns="0" tIns="0" rIns="0" bIns="0" rtlCol="0" anchor="ctr"/>
           <a:lstStyle/>
           <a:p>
             <a:pPr algn="ctr" indent="0" marL="0">
               <a:buNone/>
             </a:pPr>
             <a:r>
-              <a:rPr lang="en-US" sz="1050" dirty="0">
+              <a:rPr lang="en-US" sz="900" dirty="0">
                 <a:solidFill>
                   <a:srgbClr val="6E6146"/>
                 </a:solidFill>
@@ -2436,98 +2463,20 @@
               </a:rPr>
               <a:t>efficiency heatmap</a:t>
             </a:r>
-            <a:endParaRPr lang="en-US" sz="1050" dirty="0"/>
-          </a:p>
-        </p:txBody>
-      </p:sp>
-      <p:sp>
-        <p:nvSpPr>
-          <p:cNvPr id="32" name="Text 30"/>
-          <p:cNvSpPr/>
-          <p:nvPr/>
-        </p:nvSpPr>
-        <p:spPr>
-          <a:xfrm>
-            <a:off x="640080" y="3977640"/>
-            <a:ext cx="3440521" cy="274320"/>
-          </a:xfrm>
-          <a:prstGeom prst="rect">
-            <a:avLst/>
-          </a:prstGeom>
-          <a:noFill/>
-          <a:ln/>
-        </p:spPr>
-        <p:txBody>
-          <a:bodyPr wrap="square" rtlCol="0" anchor="ctr"/>
-          <a:lstStyle/>
-          <a:p>
-            <a:pPr algn="ctr" indent="0" marL="0">
-              <a:buNone/>
-            </a:pPr>
-            <a:r>
-              <a:rPr lang="en-US" sz="1100" b="1" spc="200" kern="0" dirty="0">
-                <a:solidFill>
-                  <a:srgbClr val="D8A94E"/>
-                </a:solidFill>
-                <a:latin typeface="Calibri" pitchFamily="34" charset="0"/>
-                <a:ea typeface="Calibri" pitchFamily="34" charset="-122"/>
-                <a:cs typeface="Calibri" pitchFamily="34" charset="-120"/>
-              </a:rPr>
-              <a:t>EDGE</a:t>
-            </a:r>
-            <a:endParaRPr lang="en-US" sz="1100" dirty="0"/>
-          </a:p>
-        </p:txBody>
-      </p:sp>
-      <p:sp>
-        <p:nvSpPr>
-          <p:cNvPr id="33" name="Text 31"/>
-          <p:cNvSpPr/>
-          <p:nvPr/>
-        </p:nvSpPr>
-        <p:spPr>
-          <a:xfrm>
-            <a:off x="4375587" y="3977640"/>
-            <a:ext cx="7176028" cy="274320"/>
-          </a:xfrm>
-          <a:prstGeom prst="rect">
-            <a:avLst/>
-          </a:prstGeom>
-          <a:noFill/>
-          <a:ln/>
-        </p:spPr>
-        <p:txBody>
-          <a:bodyPr wrap="square" rtlCol="0" anchor="ctr"/>
-          <a:lstStyle/>
-          <a:p>
-            <a:pPr algn="ctr" indent="0" marL="0">
-              <a:buNone/>
-            </a:pPr>
-            <a:r>
-              <a:rPr lang="en-US" sz="1100" b="1" spc="200" kern="0" dirty="0">
-                <a:solidFill>
-                  <a:srgbClr val="8A5A16"/>
-                </a:solidFill>
-                <a:latin typeface="Calibri" pitchFamily="34" charset="0"/>
-                <a:ea typeface="Calibri" pitchFamily="34" charset="-122"/>
-                <a:cs typeface="Calibri" pitchFamily="34" charset="-120"/>
-              </a:rPr>
-              <a:t>CLOUD</a:t>
-            </a:r>
-            <a:endParaRPr lang="en-US" sz="1100" dirty="0"/>
-          </a:p>
-        </p:txBody>
-      </p:sp>
-      <p:sp>
-        <p:nvSpPr>
-          <p:cNvPr id="34" name="Text 32"/>
-          <p:cNvSpPr/>
-          <p:nvPr/>
-        </p:nvSpPr>
-        <p:spPr>
-          <a:xfrm>
-            <a:off x="640080" y="5212080"/>
-            <a:ext cx="10972800" cy="640080"/>
+            <a:endParaRPr lang="en-US" sz="900" dirty="0"/>
+          </a:p>
+        </p:txBody>
+      </p:sp>
+      <p:sp>
+        <p:nvSpPr>
+          <p:cNvPr id="29" name="Text 27"/>
+          <p:cNvSpPr/>
+          <p:nvPr/>
+        </p:nvSpPr>
+        <p:spPr>
+          <a:xfrm>
+            <a:off x="640080" y="5257800"/>
+            <a:ext cx="10972800" cy="731520"/>
           </a:xfrm>
           <a:prstGeom prst="rect">
             <a:avLst/>
@@ -2669,34 +2618,14 @@
       </p:sp>
       <p:sp>
         <p:nvSpPr>
-          <p:cNvPr id="4" name="Shape 2"/>
-          <p:cNvSpPr/>
-          <p:nvPr/>
-        </p:nvSpPr>
-        <p:spPr>
-          <a:xfrm>
-            <a:off x="731520" y="1965960"/>
-            <a:ext cx="685800" cy="685800"/>
-          </a:xfrm>
-          <a:prstGeom prst="ellipse">
-            <a:avLst/>
-          </a:prstGeom>
-          <a:solidFill>
-            <a:srgbClr val="8A5A16"/>
-          </a:solidFill>
-          <a:ln/>
-        </p:spPr>
-      </p:sp>
-      <p:sp>
-        <p:nvSpPr>
-          <p:cNvPr id="5" name="Text 3"/>
-          <p:cNvSpPr/>
-          <p:nvPr/>
-        </p:nvSpPr>
-        <p:spPr>
-          <a:xfrm>
-            <a:off x="731520" y="1965960"/>
-            <a:ext cx="685800" cy="685800"/>
+          <p:cNvPr id="4" name="Text 2"/>
+          <p:cNvSpPr/>
+          <p:nvPr/>
+        </p:nvSpPr>
+        <p:spPr>
+          <a:xfrm>
+            <a:off x="640080" y="1737360"/>
+            <a:ext cx="1097280" cy="1097280"/>
           </a:xfrm>
           <a:prstGeom prst="rect">
             <a:avLst/>
@@ -2708,13 +2637,13 @@
           <a:bodyPr wrap="square" lIns="0" tIns="0" rIns="0" bIns="0" rtlCol="0" anchor="ctr"/>
           <a:lstStyle/>
           <a:p>
-            <a:pPr algn="ctr" indent="0" marL="0">
-              <a:buNone/>
-            </a:pPr>
-            <a:r>
-              <a:rPr lang="en-US" sz="2600" b="1" dirty="0">
-                <a:solidFill>
-                  <a:srgbClr val="FFFFFF"/>
+            <a:pPr indent="0" marL="0">
+              <a:buNone/>
+            </a:pPr>
+            <a:r>
+              <a:rPr lang="en-US" sz="5400" b="1" dirty="0">
+                <a:solidFill>
+                  <a:srgbClr val="F7F1E4"/>
                 </a:solidFill>
                 <a:latin typeface="Bookman Old Style" pitchFamily="34" charset="0"/>
                 <a:ea typeface="Bookman Old Style" pitchFamily="34" charset="-122"/>
@@ -2722,9 +2651,32 @@
               </a:rPr>
               <a:t>1</a:t>
             </a:r>
-            <a:endParaRPr lang="en-US" sz="2600" dirty="0"/>
-          </a:p>
-        </p:txBody>
+            <a:endParaRPr lang="en-US" sz="5400" dirty="0"/>
+          </a:p>
+        </p:txBody>
+      </p:sp>
+      <p:sp>
+        <p:nvSpPr>
+          <p:cNvPr id="5" name="Shape 3"/>
+          <p:cNvSpPr/>
+          <p:nvPr/>
+        </p:nvSpPr>
+        <p:spPr>
+          <a:xfrm>
+            <a:off x="1828800" y="1920240"/>
+            <a:ext cx="0" cy="1051560"/>
+          </a:xfrm>
+          <a:prstGeom prst="line">
+            <a:avLst/>
+          </a:prstGeom>
+          <a:noFill/>
+          <a:ln w="25400">
+            <a:solidFill>
+              <a:srgbClr val="B9822A"/>
+            </a:solidFill>
+            <a:prstDash val="solid"/>
+          </a:ln>
+        </p:spPr>
       </p:sp>
       <p:sp>
         <p:nvSpPr>
@@ -2734,8 +2686,8 @@
         </p:nvSpPr>
         <p:spPr>
           <a:xfrm>
-            <a:off x="1691640" y="1920240"/>
-            <a:ext cx="9875520" cy="411480"/>
+            <a:off x="2057400" y="1874520"/>
+            <a:ext cx="9509760" cy="411480"/>
           </a:xfrm>
           <a:prstGeom prst="rect">
             <a:avLst/>
@@ -2759,7 +2711,7 @@
                 <a:ea typeface="Calibri" pitchFamily="34" charset="-122"/>
                 <a:cs typeface="Calibri" pitchFamily="34" charset="-120"/>
               </a:rPr>
-              <a:t>Pipeline health, all green</a:t>
+              <a:t>A per-array efficiency heatmap</a:t>
             </a:r>
             <a:endParaRPr lang="en-US" sz="1800" dirty="0"/>
           </a:p>
@@ -2773,8 +2725,8 @@
         </p:nvSpPr>
         <p:spPr>
           <a:xfrm>
-            <a:off x="1691640" y="2340864"/>
-            <a:ext cx="9875520" cy="640080"/>
+            <a:off x="2057400" y="2313432"/>
+            <a:ext cx="9509760" cy="822960"/>
           </a:xfrm>
           <a:prstGeom prst="rect">
             <a:avLst/>
@@ -2798,7 +2750,7 @@
                 <a:ea typeface="Calibri" pitchFamily="34" charset="-122"/>
                 <a:cs typeface="Calibri" pitchFamily="34" charset="-120"/>
               </a:rPr>
-              <a:t>Gateway, queue, processor and pipeline all up on the live deployment.</a:t>
+              <a:t>The serving layer fuses inverter output and panel temperature into a graded 0-100 efficiency index, rendered as a per-window heatmap.</a:t>
             </a:r>
             <a:endParaRPr lang="en-US" sz="1350" dirty="0"/>
           </a:p>
@@ -2806,34 +2758,14 @@
       </p:sp>
       <p:sp>
         <p:nvSpPr>
-          <p:cNvPr id="8" name="Shape 6"/>
-          <p:cNvSpPr/>
-          <p:nvPr/>
-        </p:nvSpPr>
-        <p:spPr>
-          <a:xfrm>
-            <a:off x="731520" y="3383280"/>
-            <a:ext cx="685800" cy="685800"/>
-          </a:xfrm>
-          <a:prstGeom prst="ellipse">
-            <a:avLst/>
-          </a:prstGeom>
-          <a:solidFill>
-            <a:srgbClr val="8A5A16"/>
-          </a:solidFill>
-          <a:ln/>
-        </p:spPr>
-      </p:sp>
-      <p:sp>
-        <p:nvSpPr>
-          <p:cNvPr id="9" name="Text 7"/>
-          <p:cNvSpPr/>
-          <p:nvPr/>
-        </p:nvSpPr>
-        <p:spPr>
-          <a:xfrm>
-            <a:off x="731520" y="3383280"/>
-            <a:ext cx="685800" cy="685800"/>
+          <p:cNvPr id="8" name="Text 6"/>
+          <p:cNvSpPr/>
+          <p:nvPr/>
+        </p:nvSpPr>
+        <p:spPr>
+          <a:xfrm>
+            <a:off x="640080" y="3200400"/>
+            <a:ext cx="1097280" cy="1097280"/>
           </a:xfrm>
           <a:prstGeom prst="rect">
             <a:avLst/>
@@ -2845,13 +2777,13 @@
           <a:bodyPr wrap="square" lIns="0" tIns="0" rIns="0" bIns="0" rtlCol="0" anchor="ctr"/>
           <a:lstStyle/>
           <a:p>
-            <a:pPr algn="ctr" indent="0" marL="0">
-              <a:buNone/>
-            </a:pPr>
-            <a:r>
-              <a:rPr lang="en-US" sz="2600" b="1" dirty="0">
-                <a:solidFill>
-                  <a:srgbClr val="FFFFFF"/>
+            <a:pPr indent="0" marL="0">
+              <a:buNone/>
+            </a:pPr>
+            <a:r>
+              <a:rPr lang="en-US" sz="5400" b="1" dirty="0">
+                <a:solidFill>
+                  <a:srgbClr val="F7F1E4"/>
                 </a:solidFill>
                 <a:latin typeface="Bookman Old Style" pitchFamily="34" charset="0"/>
                 <a:ea typeface="Bookman Old Style" pitchFamily="34" charset="-122"/>
@@ -2859,9 +2791,32 @@
               </a:rPr>
               <a:t>2</a:t>
             </a:r>
-            <a:endParaRPr lang="en-US" sz="2600" dirty="0"/>
-          </a:p>
-        </p:txBody>
+            <a:endParaRPr lang="en-US" sz="5400" dirty="0"/>
+          </a:p>
+        </p:txBody>
+      </p:sp>
+      <p:sp>
+        <p:nvSpPr>
+          <p:cNvPr id="9" name="Shape 7"/>
+          <p:cNvSpPr/>
+          <p:nvPr/>
+        </p:nvSpPr>
+        <p:spPr>
+          <a:xfrm>
+            <a:off x="1828800" y="3383280"/>
+            <a:ext cx="0" cy="1051560"/>
+          </a:xfrm>
+          <a:prstGeom prst="line">
+            <a:avLst/>
+          </a:prstGeom>
+          <a:noFill/>
+          <a:ln w="25400">
+            <a:solidFill>
+              <a:srgbClr val="B9822A"/>
+            </a:solidFill>
+            <a:prstDash val="solid"/>
+          </a:ln>
+        </p:spPr>
       </p:sp>
       <p:sp>
         <p:nvSpPr>
@@ -2871,8 +2826,8 @@
         </p:nvSpPr>
         <p:spPr>
           <a:xfrm>
-            <a:off x="1691640" y="3337560"/>
-            <a:ext cx="9875520" cy="411480"/>
+            <a:off x="2057400" y="3337560"/>
+            <a:ext cx="9509760" cy="411480"/>
           </a:xfrm>
           <a:prstGeom prst="rect">
             <a:avLst/>
@@ -2896,7 +2851,7 @@
                 <a:ea typeface="Calibri" pitchFamily="34" charset="-122"/>
                 <a:cs typeface="Calibri" pitchFamily="34" charset="-120"/>
               </a:rPr>
-              <a:t>Live efficiency heatmap</a:t>
+              <a:t>Two live alerts on array-2</a:t>
             </a:r>
             <a:endParaRPr lang="en-US" sz="1800" dirty="0"/>
           </a:p>
@@ -2910,8 +2865,8 @@
         </p:nvSpPr>
         <p:spPr>
           <a:xfrm>
-            <a:off x="1691640" y="3758184"/>
-            <a:ext cx="9875520" cy="640080"/>
+            <a:off x="2057400" y="3776472"/>
+            <a:ext cx="9509760" cy="822960"/>
           </a:xfrm>
           <a:prstGeom prst="rect">
             <a:avLst/>
@@ -2935,7 +2890,7 @@
                 <a:ea typeface="Calibri" pitchFamily="34" charset="-122"/>
                 <a:cs typeface="Calibri" pitchFamily="34" charset="-120"/>
               </a:rPr>
-              <a:t>Per-array readings and a per-window efficiency heatmap, with alerts for thermal derate, inverter underperformance, undervoltage and cleaning.</a:t>
+              <a:t>Inverter underperformance and an undervoltage fault are both firing on array-2 right now, alongside the inverter-output trend.</a:t>
             </a:r>
             <a:endParaRPr lang="en-US" sz="1350" dirty="0"/>
           </a:p>
@@ -2943,34 +2898,14 @@
       </p:sp>
       <p:sp>
         <p:nvSpPr>
-          <p:cNvPr id="12" name="Shape 10"/>
-          <p:cNvSpPr/>
-          <p:nvPr/>
-        </p:nvSpPr>
-        <p:spPr>
-          <a:xfrm>
-            <a:off x="731520" y="4800600"/>
-            <a:ext cx="685800" cy="685800"/>
-          </a:xfrm>
-          <a:prstGeom prst="ellipse">
-            <a:avLst/>
-          </a:prstGeom>
-          <a:solidFill>
-            <a:srgbClr val="8A5A16"/>
-          </a:solidFill>
-          <a:ln/>
-        </p:spPr>
-      </p:sp>
-      <p:sp>
-        <p:nvSpPr>
-          <p:cNvPr id="13" name="Text 11"/>
-          <p:cNvSpPr/>
-          <p:nvPr/>
-        </p:nvSpPr>
-        <p:spPr>
-          <a:xfrm>
-            <a:off x="731520" y="4800600"/>
-            <a:ext cx="685800" cy="685800"/>
+          <p:cNvPr id="12" name="Text 10"/>
+          <p:cNvSpPr/>
+          <p:nvPr/>
+        </p:nvSpPr>
+        <p:spPr>
+          <a:xfrm>
+            <a:off x="640080" y="4663440"/>
+            <a:ext cx="1097280" cy="1097280"/>
           </a:xfrm>
           <a:prstGeom prst="rect">
             <a:avLst/>
@@ -2982,13 +2917,13 @@
           <a:bodyPr wrap="square" lIns="0" tIns="0" rIns="0" bIns="0" rtlCol="0" anchor="ctr"/>
           <a:lstStyle/>
           <a:p>
-            <a:pPr algn="ctr" indent="0" marL="0">
-              <a:buNone/>
-            </a:pPr>
-            <a:r>
-              <a:rPr lang="en-US" sz="2600" b="1" dirty="0">
-                <a:solidFill>
-                  <a:srgbClr val="FFFFFF"/>
+            <a:pPr indent="0" marL="0">
+              <a:buNone/>
+            </a:pPr>
+            <a:r>
+              <a:rPr lang="en-US" sz="5400" b="1" dirty="0">
+                <a:solidFill>
+                  <a:srgbClr val="F7F1E4"/>
                 </a:solidFill>
                 <a:latin typeface="Bookman Old Style" pitchFamily="34" charset="0"/>
                 <a:ea typeface="Bookman Old Style" pitchFamily="34" charset="-122"/>
@@ -2996,9 +2931,32 @@
               </a:rPr>
               <a:t>3</a:t>
             </a:r>
-            <a:endParaRPr lang="en-US" sz="2600" dirty="0"/>
-          </a:p>
-        </p:txBody>
+            <a:endParaRPr lang="en-US" sz="5400" dirty="0"/>
+          </a:p>
+        </p:txBody>
+      </p:sp>
+      <p:sp>
+        <p:nvSpPr>
+          <p:cNvPr id="13" name="Shape 11"/>
+          <p:cNvSpPr/>
+          <p:nvPr/>
+        </p:nvSpPr>
+        <p:spPr>
+          <a:xfrm>
+            <a:off x="1828800" y="4846320"/>
+            <a:ext cx="0" cy="1051560"/>
+          </a:xfrm>
+          <a:prstGeom prst="line">
+            <a:avLst/>
+          </a:prstGeom>
+          <a:noFill/>
+          <a:ln w="25400">
+            <a:solidFill>
+              <a:srgbClr val="B9822A"/>
+            </a:solidFill>
+            <a:prstDash val="solid"/>
+          </a:ln>
+        </p:spPr>
       </p:sp>
       <p:sp>
         <p:nvSpPr>
@@ -3008,8 +2966,8 @@
         </p:nvSpPr>
         <p:spPr>
           <a:xfrm>
-            <a:off x="1691640" y="4754880"/>
-            <a:ext cx="9875520" cy="411480"/>
+            <a:off x="2057400" y="4800600"/>
+            <a:ext cx="9509760" cy="411480"/>
           </a:xfrm>
           <a:prstGeom prst="rect">
             <a:avLst/>
@@ -3033,7 +2991,7 @@
                 <a:ea typeface="Calibri" pitchFamily="34" charset="-122"/>
                 <a:cs typeface="Calibri" pitchFamily="34" charset="-120"/>
               </a:rPr>
-              <a:t>Tested and scales</a:t>
+              <a:t>Live per-array readings</a:t>
             </a:r>
             <a:endParaRPr lang="en-US" sz="1800" dirty="0"/>
           </a:p>
@@ -3047,8 +3005,8 @@
         </p:nvSpPr>
         <p:spPr>
           <a:xfrm>
-            <a:off x="1691640" y="5175504"/>
-            <a:ext cx="9875520" cy="640080"/>
+            <a:off x="2057400" y="5239512"/>
+            <a:ext cx="9509760" cy="822960"/>
           </a:xfrm>
           <a:prstGeom prst="rect">
             <a:avLst/>
@@ -3072,7 +3030,7 @@
                 <a:ea typeface="Calibri" pitchFamily="34" charset="-122"/>
                 <a:cs typeface="Calibri" pitchFamily="34" charset="-120"/>
               </a:rPr>
-              <a:t>99 automated tests pass across sensors, fog, backend and dashboard; a 2,000-message burst pushed through by 32 parallel senders.</a:t>
+              <a:t>Irradiance, panel temperature, inverter output, DC voltage and soiling for both arrays, so a hot, derating panel is visible early.</a:t>
             </a:r>
             <a:endParaRPr lang="en-US" sz="1350" dirty="0"/>
           </a:p>
@@ -3086,7 +3044,7 @@
         </p:nvSpPr>
         <p:spPr>
           <a:xfrm>
-            <a:off x="640080" y="6263640"/>
+            <a:off x="640080" y="6309360"/>
             <a:ext cx="10972800" cy="365760"/>
           </a:xfrm>
           <a:prstGeom prst="rect">
@@ -3157,24 +3115,24 @@
         </p:nvSpPr>
         <p:spPr>
           <a:xfrm>
-            <a:off x="640080" y="640080"/>
-            <a:ext cx="10972800" cy="640080"/>
-          </a:xfrm>
-          <a:prstGeom prst="rect">
-            <a:avLst/>
-          </a:prstGeom>
-          <a:noFill/>
-          <a:ln/>
-        </p:spPr>
-        <p:txBody>
-          <a:bodyPr wrap="square" rtlCol="0" anchor="ctr"/>
+            <a:off x="640080" y="594360"/>
+            <a:ext cx="10972800" cy="822960"/>
+          </a:xfrm>
+          <a:prstGeom prst="rect">
+            <a:avLst/>
+          </a:prstGeom>
+          <a:noFill/>
+          <a:ln/>
+        </p:spPr>
+        <p:txBody>
+          <a:bodyPr wrap="square" rtlCol="0" anchor="t"/>
           <a:lstStyle/>
           <a:p>
             <a:pPr indent="0" marL="0">
               <a:buNone/>
             </a:pPr>
             <a:r>
-              <a:rPr lang="en-US" sz="3000" b="1" dirty="0">
+              <a:rPr lang="en-US" sz="2800" b="1" dirty="0">
                 <a:solidFill>
                   <a:srgbClr val="FFFFFF"/>
                 </a:solidFill>
@@ -3184,30 +3142,65 @@
               </a:rPr>
               <a:t>Hardest Part — a buffer that never sits still</a:t>
             </a:r>
-            <a:endParaRPr lang="en-US" sz="3000" dirty="0"/>
-          </a:p>
-        </p:txBody>
-      </p:sp>
-      <p:sp>
-        <p:nvSpPr>
-          <p:cNvPr id="3" name="Shape 1"/>
-          <p:cNvSpPr/>
-          <p:nvPr/>
-        </p:nvSpPr>
-        <p:spPr>
-          <a:xfrm>
-            <a:off x="731520" y="1920240"/>
-            <a:ext cx="10698480" cy="1965960"/>
-          </a:xfrm>
-          <a:prstGeom prst="roundRect">
-            <a:avLst>
-              <a:gd name="adj" fmla="val 4651"/>
-            </a:avLst>
-          </a:prstGeom>
-          <a:solidFill>
-            <a:srgbClr val="3A2D18"/>
-          </a:solidFill>
-          <a:ln w="15875">
+            <a:endParaRPr lang="en-US" sz="2800" dirty="0"/>
+          </a:p>
+        </p:txBody>
+      </p:sp>
+      <p:sp>
+        <p:nvSpPr>
+          <p:cNvPr id="3" name="Text 1"/>
+          <p:cNvSpPr/>
+          <p:nvPr/>
+        </p:nvSpPr>
+        <p:spPr>
+          <a:xfrm>
+            <a:off x="731520" y="1965960"/>
+            <a:ext cx="2377440" cy="548640"/>
+          </a:xfrm>
+          <a:prstGeom prst="rect">
+            <a:avLst/>
+          </a:prstGeom>
+          <a:noFill/>
+          <a:ln/>
+        </p:spPr>
+        <p:txBody>
+          <a:bodyPr wrap="square" lIns="0" tIns="0" rIns="0" bIns="0" rtlCol="0" anchor="ctr"/>
+          <a:lstStyle/>
+          <a:p>
+            <a:pPr indent="0" marL="0">
+              <a:buNone/>
+            </a:pPr>
+            <a:r>
+              <a:rPr lang="en-US" sz="2200" b="1" dirty="0">
+                <a:solidFill>
+                  <a:srgbClr val="E7C24A"/>
+                </a:solidFill>
+                <a:latin typeface="Bookman Old Style" pitchFamily="34" charset="0"/>
+                <a:ea typeface="Bookman Old Style" pitchFamily="34" charset="-122"/>
+                <a:cs typeface="Bookman Old Style" pitchFamily="34" charset="-120"/>
+              </a:rPr>
+              <a:t>Problem</a:t>
+            </a:r>
+            <a:endParaRPr lang="en-US" sz="2200" dirty="0"/>
+          </a:p>
+        </p:txBody>
+      </p:sp>
+      <p:sp>
+        <p:nvSpPr>
+          <p:cNvPr id="4" name="Shape 2"/>
+          <p:cNvSpPr/>
+          <p:nvPr/>
+        </p:nvSpPr>
+        <p:spPr>
+          <a:xfrm>
+            <a:off x="3200400" y="1920240"/>
+            <a:ext cx="0" cy="1737360"/>
+          </a:xfrm>
+          <a:prstGeom prst="line">
+            <a:avLst/>
+          </a:prstGeom>
+          <a:noFill/>
+          <a:ln w="25400">
             <a:solidFill>
               <a:srgbClr val="E7C24A"/>
             </a:solidFill>
@@ -3217,14 +3210,14 @@
       </p:sp>
       <p:sp>
         <p:nvSpPr>
-          <p:cNvPr id="4" name="Text 2"/>
-          <p:cNvSpPr/>
-          <p:nvPr/>
-        </p:nvSpPr>
-        <p:spPr>
-          <a:xfrm>
-            <a:off x="1005840" y="2103120"/>
-            <a:ext cx="3657600" cy="457200"/>
+          <p:cNvPr id="5" name="Text 3"/>
+          <p:cNvSpPr/>
+          <p:nvPr/>
+        </p:nvSpPr>
+        <p:spPr>
+          <a:xfrm>
+            <a:off x="3474720" y="1920240"/>
+            <a:ext cx="7955280" cy="1874520"/>
           </a:xfrm>
           <a:prstGeom prst="rect">
             <a:avLst/>
@@ -3237,85 +3230,81 @@
           <a:lstStyle/>
           <a:p>
             <a:pPr indent="0" marL="0">
-              <a:buNone/>
-            </a:pPr>
-            <a:r>
-              <a:rPr lang="en-US" sz="1900" b="1" dirty="0">
-                <a:solidFill>
-                  <a:srgbClr val="E7C24A"/>
+              <a:lnSpc>
+                <a:spcPct val="110000"/>
+              </a:lnSpc>
+              <a:buNone/>
+            </a:pPr>
+            <a:r>
+              <a:rPr lang="en-US" sz="1450" dirty="0">
+                <a:solidFill>
+                  <a:srgbClr val="EAD9B8"/>
+                </a:solidFill>
+                <a:latin typeface="Calibri" pitchFamily="34" charset="0"/>
+                <a:ea typeface="Calibri" pitchFamily="34" charset="-122"/>
+                <a:cs typeface="Calibri" pitchFamily="34" charset="-120"/>
+              </a:rPr>
+              <a:t>Every few seconds the fog node must take everything buffered so far and aggregate it into window summaries, while ten sensors keep writing new readings into that same buffer. One shared buffer and one lock means aggregation blocks ingest — copying under the lock stalls every sensor at every window, and skipping the lock loses or double-counts readings. A textbook reader-writer race.</a:t>
+            </a:r>
+            <a:endParaRPr lang="en-US" sz="1450" dirty="0"/>
+          </a:p>
+        </p:txBody>
+      </p:sp>
+      <p:sp>
+        <p:nvSpPr>
+          <p:cNvPr id="6" name="Text 4"/>
+          <p:cNvSpPr/>
+          <p:nvPr/>
+        </p:nvSpPr>
+        <p:spPr>
+          <a:xfrm>
+            <a:off x="731520" y="4114800"/>
+            <a:ext cx="2377440" cy="548640"/>
+          </a:xfrm>
+          <a:prstGeom prst="rect">
+            <a:avLst/>
+          </a:prstGeom>
+          <a:noFill/>
+          <a:ln/>
+        </p:spPr>
+        <p:txBody>
+          <a:bodyPr wrap="square" lIns="0" tIns="0" rIns="0" bIns="0" rtlCol="0" anchor="ctr"/>
+          <a:lstStyle/>
+          <a:p>
+            <a:pPr indent="0" marL="0">
+              <a:buNone/>
+            </a:pPr>
+            <a:r>
+              <a:rPr lang="en-US" sz="2200" b="1" dirty="0">
+                <a:solidFill>
+                  <a:srgbClr val="D8A94E"/>
                 </a:solidFill>
                 <a:latin typeface="Bookman Old Style" pitchFamily="34" charset="0"/>
                 <a:ea typeface="Bookman Old Style" pitchFamily="34" charset="-122"/>
                 <a:cs typeface="Bookman Old Style" pitchFamily="34" charset="-120"/>
               </a:rPr>
-              <a:t>Problem</a:t>
-            </a:r>
-            <a:endParaRPr lang="en-US" sz="1900" dirty="0"/>
-          </a:p>
-        </p:txBody>
-      </p:sp>
-      <p:sp>
-        <p:nvSpPr>
-          <p:cNvPr id="5" name="Text 3"/>
-          <p:cNvSpPr/>
-          <p:nvPr/>
-        </p:nvSpPr>
-        <p:spPr>
-          <a:xfrm>
-            <a:off x="1005840" y="2578608"/>
-            <a:ext cx="9966960" cy="1188720"/>
-          </a:xfrm>
-          <a:prstGeom prst="rect">
-            <a:avLst/>
-          </a:prstGeom>
-          <a:noFill/>
-          <a:ln/>
-        </p:spPr>
-        <p:txBody>
-          <a:bodyPr wrap="square" lIns="0" tIns="0" rIns="0" bIns="0" rtlCol="0" anchor="ctr"/>
-          <a:lstStyle/>
-          <a:p>
-            <a:pPr indent="0" marL="0">
-              <a:lnSpc>
-                <a:spcPct val="105000"/>
-              </a:lnSpc>
-              <a:buNone/>
-            </a:pPr>
-            <a:r>
-              <a:rPr lang="en-US" sz="1300" dirty="0">
-                <a:solidFill>
-                  <a:srgbClr val="EAD9B8"/>
-                </a:solidFill>
-                <a:latin typeface="Calibri" pitchFamily="34" charset="0"/>
-                <a:ea typeface="Calibri" pitchFamily="34" charset="-122"/>
-                <a:cs typeface="Calibri" pitchFamily="34" charset="-120"/>
-              </a:rPr>
-              <a:t>Every few seconds the fog node must take everything buffered so far and aggregate it into window summaries, while ten sensors keep writing new readings into that same buffer. One shared buffer and one lock means aggregation blocks ingest — copying under the lock stalls every sensor at every window, and skipping the lock loses or double-counts readings. A textbook reader-writer race.</a:t>
-            </a:r>
-            <a:endParaRPr lang="en-US" sz="1300" dirty="0"/>
-          </a:p>
-        </p:txBody>
-      </p:sp>
-      <p:sp>
-        <p:nvSpPr>
-          <p:cNvPr id="6" name="Shape 4"/>
-          <p:cNvSpPr/>
-          <p:nvPr/>
-        </p:nvSpPr>
-        <p:spPr>
-          <a:xfrm>
-            <a:off x="731520" y="4041648"/>
-            <a:ext cx="10698480" cy="1965960"/>
-          </a:xfrm>
-          <a:prstGeom prst="roundRect">
-            <a:avLst>
-              <a:gd name="adj" fmla="val 4651"/>
-            </a:avLst>
-          </a:prstGeom>
-          <a:solidFill>
-            <a:srgbClr val="3A2D18"/>
-          </a:solidFill>
-          <a:ln w="15875">
+              <a:t>Solution</a:t>
+            </a:r>
+            <a:endParaRPr lang="en-US" sz="2200" dirty="0"/>
+          </a:p>
+        </p:txBody>
+      </p:sp>
+      <p:sp>
+        <p:nvSpPr>
+          <p:cNvPr id="7" name="Shape 5"/>
+          <p:cNvSpPr/>
+          <p:nvPr/>
+        </p:nvSpPr>
+        <p:spPr>
+          <a:xfrm>
+            <a:off x="3200400" y="4069080"/>
+            <a:ext cx="0" cy="1737360"/>
+          </a:xfrm>
+          <a:prstGeom prst="line">
+            <a:avLst/>
+          </a:prstGeom>
+          <a:noFill/>
+          <a:ln w="25400">
             <a:solidFill>
               <a:srgbClr val="D8A94E"/>
             </a:solidFill>
@@ -3325,53 +3314,14 @@
       </p:sp>
       <p:sp>
         <p:nvSpPr>
-          <p:cNvPr id="7" name="Text 5"/>
-          <p:cNvSpPr/>
-          <p:nvPr/>
-        </p:nvSpPr>
-        <p:spPr>
-          <a:xfrm>
-            <a:off x="1005840" y="4224528"/>
-            <a:ext cx="3657600" cy="457200"/>
-          </a:xfrm>
-          <a:prstGeom prst="rect">
-            <a:avLst/>
-          </a:prstGeom>
-          <a:noFill/>
-          <a:ln/>
-        </p:spPr>
-        <p:txBody>
-          <a:bodyPr wrap="square" lIns="0" tIns="0" rIns="0" bIns="0" rtlCol="0" anchor="ctr"/>
-          <a:lstStyle/>
-          <a:p>
-            <a:pPr indent="0" marL="0">
-              <a:buNone/>
-            </a:pPr>
-            <a:r>
-              <a:rPr lang="en-US" sz="1900" b="1" dirty="0">
-                <a:solidFill>
-                  <a:srgbClr val="D8A94E"/>
-                </a:solidFill>
-                <a:latin typeface="Bookman Old Style" pitchFamily="34" charset="0"/>
-                <a:ea typeface="Bookman Old Style" pitchFamily="34" charset="-122"/>
-                <a:cs typeface="Bookman Old Style" pitchFamily="34" charset="-120"/>
-              </a:rPr>
-              <a:t>Solution</a:t>
-            </a:r>
-            <a:endParaRPr lang="en-US" sz="1900" dirty="0"/>
-          </a:p>
-        </p:txBody>
-      </p:sp>
-      <p:sp>
-        <p:nvSpPr>
           <p:cNvPr id="8" name="Text 6"/>
           <p:cNvSpPr/>
           <p:nvPr/>
         </p:nvSpPr>
         <p:spPr>
           <a:xfrm>
-            <a:off x="1005840" y="4700016"/>
-            <a:ext cx="9966960" cy="1188720"/>
+            <a:off x="3474720" y="4069080"/>
+            <a:ext cx="7955280" cy="1874520"/>
           </a:xfrm>
           <a:prstGeom prst="rect">
             <a:avLst/>
@@ -3385,12 +3335,12 @@
           <a:p>
             <a:pPr indent="0" marL="0">
               <a:lnSpc>
-                <a:spcPct val="105000"/>
+                <a:spcPct val="110000"/>
               </a:lnSpc>
               <a:buNone/>
             </a:pPr>
             <a:r>
-              <a:rPr lang="en-US" sz="1300" dirty="0">
+              <a:rPr lang="en-US" sz="1450" dirty="0">
                 <a:solidFill>
                   <a:srgbClr val="EAD9B8"/>
                 </a:solidFill>
@@ -3400,7 +3350,7 @@
               </a:rPr>
               <a:t>Double buffering: two buffers, one live and one flushing. The lock is held only for an instant pointer swap of the two, so aggregation works on the swapped-out data while new readings flow into the fresh buffer. A concurrent-writer stress test proves it — nothing lost, nothing copied.</a:t>
             </a:r>
-            <a:endParaRPr lang="en-US" sz="1300" dirty="0"/>
+            <a:endParaRPr lang="en-US" sz="1450" dirty="0"/>
           </a:p>
         </p:txBody>
       </p:sp>

--- a/ppt/MahekNaaz_X24217808_solar-farm-monitoring.pptx
+++ b/ppt/MahekNaaz_X24217808_solar-farm-monitoring.pptx
@@ -3089,7 +3089,7 @@
     <p:bg>
       <p:bgPr>
         <a:solidFill>
-          <a:srgbClr val="2A2012"/>
+          <a:srgbClr val="FFFFFF"/>
         </a:solidFill>
       </p:bgPr>
     </p:bg>
@@ -3115,7 +3115,7 @@
         </p:nvSpPr>
         <p:spPr>
           <a:xfrm>
-            <a:off x="640080" y="594360"/>
+            <a:off x="640080" y="502920"/>
             <a:ext cx="10972800" cy="822960"/>
           </a:xfrm>
           <a:prstGeom prst="rect">
@@ -3134,7 +3134,7 @@
             <a:r>
               <a:rPr lang="en-US" sz="2800" b="1" dirty="0">
                 <a:solidFill>
-                  <a:srgbClr val="FFFFFF"/>
+                  <a:srgbClr val="281F10"/>
                 </a:solidFill>
                 <a:latin typeface="Bookman Old Style" pitchFamily="34" charset="0"/>
                 <a:ea typeface="Bookman Old Style" pitchFamily="34" charset="-122"/>
@@ -3171,7 +3171,7 @@
               <a:buNone/>
             </a:pPr>
             <a:r>
-              <a:rPr lang="en-US" sz="2200" b="1" dirty="0">
+              <a:rPr lang="en-US" sz="2300" b="1" dirty="0">
                 <a:solidFill>
                   <a:srgbClr val="E7C24A"/>
                 </a:solidFill>
@@ -3181,7 +3181,7 @@
               </a:rPr>
               <a:t>Problem</a:t>
             </a:r>
-            <a:endParaRPr lang="en-US" sz="2200" dirty="0"/>
+            <a:endParaRPr lang="en-US" sz="2300" dirty="0"/>
           </a:p>
         </p:txBody>
       </p:sp>
@@ -3194,13 +3194,13 @@
         <p:spPr>
           <a:xfrm>
             <a:off x="3200400" y="1920240"/>
-            <a:ext cx="0" cy="1737360"/>
+            <a:ext cx="0" cy="1783080"/>
           </a:xfrm>
           <a:prstGeom prst="line">
             <a:avLst/>
           </a:prstGeom>
           <a:noFill/>
-          <a:ln w="25400">
+          <a:ln w="31750">
             <a:solidFill>
               <a:srgbClr val="E7C24A"/>
             </a:solidFill>
@@ -3217,7 +3217,7 @@
         <p:spPr>
           <a:xfrm>
             <a:off x="3474720" y="1920240"/>
-            <a:ext cx="7955280" cy="1874520"/>
+            <a:ext cx="7955280" cy="1920240"/>
           </a:xfrm>
           <a:prstGeom prst="rect">
             <a:avLst/>
@@ -3231,14 +3231,14 @@
           <a:p>
             <a:pPr indent="0" marL="0">
               <a:lnSpc>
-                <a:spcPct val="110000"/>
+                <a:spcPct val="112000"/>
               </a:lnSpc>
               <a:buNone/>
             </a:pPr>
             <a:r>
               <a:rPr lang="en-US" sz="1450" dirty="0">
                 <a:solidFill>
-                  <a:srgbClr val="EAD9B8"/>
+                  <a:srgbClr val="281F10"/>
                 </a:solidFill>
                 <a:latin typeface="Calibri" pitchFamily="34" charset="0"/>
                 <a:ea typeface="Calibri" pitchFamily="34" charset="-122"/>
@@ -3275,9 +3275,9 @@
               <a:buNone/>
             </a:pPr>
             <a:r>
-              <a:rPr lang="en-US" sz="2200" b="1" dirty="0">
-                <a:solidFill>
-                  <a:srgbClr val="D8A94E"/>
+              <a:rPr lang="en-US" sz="2300" b="1" dirty="0">
+                <a:solidFill>
+                  <a:srgbClr val="B9822A"/>
                 </a:solidFill>
                 <a:latin typeface="Bookman Old Style" pitchFamily="34" charset="0"/>
                 <a:ea typeface="Bookman Old Style" pitchFamily="34" charset="-122"/>
@@ -3285,7 +3285,7 @@
               </a:rPr>
               <a:t>Solution</a:t>
             </a:r>
-            <a:endParaRPr lang="en-US" sz="2200" dirty="0"/>
+            <a:endParaRPr lang="en-US" sz="2300" dirty="0"/>
           </a:p>
         </p:txBody>
       </p:sp>
@@ -3298,15 +3298,15 @@
         <p:spPr>
           <a:xfrm>
             <a:off x="3200400" y="4069080"/>
-            <a:ext cx="0" cy="1737360"/>
+            <a:ext cx="0" cy="1783080"/>
           </a:xfrm>
           <a:prstGeom prst="line">
             <a:avLst/>
           </a:prstGeom>
           <a:noFill/>
-          <a:ln w="25400">
+          <a:ln w="31750">
             <a:solidFill>
-              <a:srgbClr val="D8A94E"/>
+              <a:srgbClr val="B9822A"/>
             </a:solidFill>
             <a:prstDash val="solid"/>
           </a:ln>
@@ -3321,7 +3321,7 @@
         <p:spPr>
           <a:xfrm>
             <a:off x="3474720" y="4069080"/>
-            <a:ext cx="7955280" cy="1874520"/>
+            <a:ext cx="7955280" cy="1920240"/>
           </a:xfrm>
           <a:prstGeom prst="rect">
             <a:avLst/>
@@ -3335,14 +3335,14 @@
           <a:p>
             <a:pPr indent="0" marL="0">
               <a:lnSpc>
-                <a:spcPct val="110000"/>
+                <a:spcPct val="112000"/>
               </a:lnSpc>
               <a:buNone/>
             </a:pPr>
             <a:r>
               <a:rPr lang="en-US" sz="1450" dirty="0">
                 <a:solidFill>
-                  <a:srgbClr val="EAD9B8"/>
+                  <a:srgbClr val="281F10"/>
                 </a:solidFill>
                 <a:latin typeface="Calibri" pitchFamily="34" charset="0"/>
                 <a:ea typeface="Calibri" pitchFamily="34" charset="-122"/>

--- a/ppt/MahekNaaz_X24217808_solar-farm-monitoring.pptx
+++ b/ppt/MahekNaaz_X24217808_solar-farm-monitoring.pptx
@@ -1617,12 +1617,12 @@
         </p:nvSpPr>
         <p:spPr>
           <a:xfrm>
-            <a:off x="640080" y="1554480"/>
-            <a:ext cx="3200400" cy="3383280"/>
+            <a:off x="640080" y="2468880"/>
+            <a:ext cx="1572768" cy="1371600"/>
           </a:xfrm>
           <a:prstGeom prst="roundRect">
             <a:avLst>
-              <a:gd name="adj" fmla="val 2857"/>
+              <a:gd name="adj" fmla="val 6667"/>
             </a:avLst>
           </a:prstGeom>
           <a:solidFill>
@@ -1638,63 +1638,146 @@
       </p:sp>
       <p:sp>
         <p:nvSpPr>
-          <p:cNvPr id="4" name="Text 2"/>
-          <p:cNvSpPr/>
-          <p:nvPr/>
-        </p:nvSpPr>
-        <p:spPr>
-          <a:xfrm>
-            <a:off x="640080" y="1691640"/>
-            <a:ext cx="3200400" cy="365760"/>
-          </a:xfrm>
-          <a:prstGeom prst="rect">
-            <a:avLst/>
-          </a:prstGeom>
-          <a:noFill/>
-          <a:ln/>
-        </p:spPr>
-        <p:txBody>
-          <a:bodyPr wrap="square" rtlCol="0" anchor="ctr"/>
+          <p:cNvPr id="4" name="Shape 2"/>
+          <p:cNvSpPr/>
+          <p:nvPr/>
+        </p:nvSpPr>
+        <p:spPr>
+          <a:xfrm>
+            <a:off x="1335024" y="2633472"/>
+            <a:ext cx="182880" cy="182880"/>
+          </a:xfrm>
+          <a:prstGeom prst="ellipse">
+            <a:avLst/>
+          </a:prstGeom>
+          <a:solidFill>
+            <a:srgbClr val="D8A94E"/>
+          </a:solidFill>
+          <a:ln/>
+        </p:spPr>
+      </p:sp>
+      <p:sp>
+        <p:nvSpPr>
+          <p:cNvPr id="5" name="Text 3"/>
+          <p:cNvSpPr/>
+          <p:nvPr/>
+        </p:nvSpPr>
+        <p:spPr>
+          <a:xfrm>
+            <a:off x="612648" y="2852928"/>
+            <a:ext cx="1627632" cy="365760"/>
+          </a:xfrm>
+          <a:prstGeom prst="rect">
+            <a:avLst/>
+          </a:prstGeom>
+          <a:noFill/>
+          <a:ln/>
+        </p:spPr>
+        <p:txBody>
+          <a:bodyPr wrap="square" lIns="0" tIns="0" rIns="0" bIns="0" rtlCol="0" anchor="ctr"/>
           <a:lstStyle/>
           <a:p>
             <a:pPr algn="ctr" indent="0" marL="0">
               <a:buNone/>
             </a:pPr>
             <a:r>
-              <a:rPr lang="en-US" sz="1200" b="1" spc="300" kern="0" dirty="0">
-                <a:solidFill>
-                  <a:srgbClr val="D8A94E"/>
+              <a:rPr lang="en-US" sz="1450" b="1" dirty="0">
+                <a:solidFill>
+                  <a:srgbClr val="281F10"/>
                 </a:solidFill>
                 <a:latin typeface="Calibri" pitchFamily="34" charset="0"/>
                 <a:ea typeface="Calibri" pitchFamily="34" charset="-122"/>
                 <a:cs typeface="Calibri" pitchFamily="34" charset="-120"/>
               </a:rPr>
-              <a:t>EDGE</a:t>
-            </a:r>
-            <a:endParaRPr lang="en-US" sz="1200" dirty="0"/>
-          </a:p>
-        </p:txBody>
-      </p:sp>
-      <p:sp>
-        <p:nvSpPr>
-          <p:cNvPr id="5" name="Shape 3"/>
-          <p:cNvSpPr/>
-          <p:nvPr/>
-        </p:nvSpPr>
-        <p:spPr>
-          <a:xfrm>
-            <a:off x="914400" y="2286000"/>
-            <a:ext cx="2651760" cy="1005840"/>
+              <a:t>Array sensors</a:t>
+            </a:r>
+            <a:endParaRPr lang="en-US" sz="1450" dirty="0"/>
+          </a:p>
+        </p:txBody>
+      </p:sp>
+      <p:sp>
+        <p:nvSpPr>
+          <p:cNvPr id="6" name="Text 4"/>
+          <p:cNvSpPr/>
+          <p:nvPr/>
+        </p:nvSpPr>
+        <p:spPr>
+          <a:xfrm>
+            <a:off x="640080" y="3200400"/>
+            <a:ext cx="1572768" cy="411480"/>
+          </a:xfrm>
+          <a:prstGeom prst="rect">
+            <a:avLst/>
+          </a:prstGeom>
+          <a:noFill/>
+          <a:ln/>
+        </p:spPr>
+        <p:txBody>
+          <a:bodyPr wrap="square" lIns="0" tIns="0" rIns="0" bIns="0" rtlCol="0" anchor="t"/>
+          <a:lstStyle/>
+          <a:p>
+            <a:pPr algn="ctr" indent="0" marL="0">
+              <a:buNone/>
+            </a:pPr>
+            <a:r>
+              <a:rPr lang="en-US" sz="1050" dirty="0">
+                <a:solidFill>
+                  <a:srgbClr val="6E6146"/>
+                </a:solidFill>
+                <a:latin typeface="Calibri" pitchFamily="34" charset="0"/>
+                <a:ea typeface="Calibri" pitchFamily="34" charset="-122"/>
+                <a:cs typeface="Calibri" pitchFamily="34" charset="-120"/>
+              </a:rPr>
+              <a:t>10 · 2 arrays · 5 metrics</a:t>
+            </a:r>
+            <a:endParaRPr lang="en-US" sz="1050" dirty="0"/>
+          </a:p>
+        </p:txBody>
+      </p:sp>
+      <p:sp>
+        <p:nvSpPr>
+          <p:cNvPr id="7" name="Shape 5"/>
+          <p:cNvSpPr/>
+          <p:nvPr/>
+        </p:nvSpPr>
+        <p:spPr>
+          <a:xfrm>
+            <a:off x="2231136" y="3154680"/>
+            <a:ext cx="258409" cy="0"/>
+          </a:xfrm>
+          <a:prstGeom prst="line">
+            <a:avLst/>
+          </a:prstGeom>
+          <a:noFill/>
+          <a:ln w="25400">
+            <a:solidFill>
+              <a:srgbClr val="D8A94E"/>
+            </a:solidFill>
+            <a:prstDash val="solid"/>
+            <a:tailEnd type="triangle"/>
+          </a:ln>
+        </p:spPr>
+      </p:sp>
+      <p:sp>
+        <p:nvSpPr>
+          <p:cNvPr id="8" name="Shape 6"/>
+          <p:cNvSpPr/>
+          <p:nvPr/>
+        </p:nvSpPr>
+        <p:spPr>
+          <a:xfrm>
+            <a:off x="2507833" y="2468880"/>
+            <a:ext cx="1572768" cy="1371600"/>
           </a:xfrm>
           <a:prstGeom prst="roundRect">
             <a:avLst>
-              <a:gd name="adj" fmla="val 7273"/>
+              <a:gd name="adj" fmla="val 6667"/>
             </a:avLst>
           </a:prstGeom>
           <a:solidFill>
-            <a:srgbClr val="FFFFFF"/>
-          </a:solidFill>
-          <a:ln w="15240">
+            <a:srgbClr val="F7F1E4"/>
+          </a:solidFill>
+          <a:ln w="19050">
             <a:solidFill>
               <a:srgbClr val="D8A94E"/>
             </a:solidFill>
@@ -1704,14 +1787,34 @@
       </p:sp>
       <p:sp>
         <p:nvSpPr>
-          <p:cNvPr id="6" name="Text 4"/>
-          <p:cNvSpPr/>
-          <p:nvPr/>
-        </p:nvSpPr>
-        <p:spPr>
-          <a:xfrm>
-            <a:off x="914400" y="2432304"/>
-            <a:ext cx="2651760" cy="365760"/>
+          <p:cNvPr id="9" name="Shape 7"/>
+          <p:cNvSpPr/>
+          <p:nvPr/>
+        </p:nvSpPr>
+        <p:spPr>
+          <a:xfrm>
+            <a:off x="3202777" y="2633472"/>
+            <a:ext cx="182880" cy="182880"/>
+          </a:xfrm>
+          <a:prstGeom prst="ellipse">
+            <a:avLst/>
+          </a:prstGeom>
+          <a:solidFill>
+            <a:srgbClr val="D8A94E"/>
+          </a:solidFill>
+          <a:ln/>
+        </p:spPr>
+      </p:sp>
+      <p:sp>
+        <p:nvSpPr>
+          <p:cNvPr id="10" name="Text 8"/>
+          <p:cNvSpPr/>
+          <p:nvPr/>
+        </p:nvSpPr>
+        <p:spPr>
+          <a:xfrm>
+            <a:off x="2480401" y="2852928"/>
+            <a:ext cx="1627632" cy="365760"/>
           </a:xfrm>
           <a:prstGeom prst="rect">
             <a:avLst/>
@@ -1727,7 +1830,7 @@
               <a:buNone/>
             </a:pPr>
             <a:r>
-              <a:rPr lang="en-US" sz="1400" b="1" dirty="0">
+              <a:rPr lang="en-US" sz="1450" b="1" dirty="0">
                 <a:solidFill>
                   <a:srgbClr val="281F10"/>
                 </a:solidFill>
@@ -1735,38 +1838,38 @@
                 <a:ea typeface="Calibri" pitchFamily="34" charset="-122"/>
                 <a:cs typeface="Calibri" pitchFamily="34" charset="-120"/>
               </a:rPr>
-              <a:t>Array sensors</a:t>
-            </a:r>
-            <a:endParaRPr lang="en-US" sz="1400" dirty="0"/>
-          </a:p>
-        </p:txBody>
-      </p:sp>
-      <p:sp>
-        <p:nvSpPr>
-          <p:cNvPr id="7" name="Text 5"/>
-          <p:cNvSpPr/>
-          <p:nvPr/>
-        </p:nvSpPr>
-        <p:spPr>
-          <a:xfrm>
-            <a:off x="914400" y="2816352"/>
-            <a:ext cx="2651760" cy="365760"/>
-          </a:xfrm>
-          <a:prstGeom prst="rect">
-            <a:avLst/>
-          </a:prstGeom>
-          <a:noFill/>
-          <a:ln/>
-        </p:spPr>
-        <p:txBody>
-          <a:bodyPr wrap="square" lIns="0" tIns="0" rIns="0" bIns="0" rtlCol="0" anchor="ctr"/>
+              <a:t>Fog node</a:t>
+            </a:r>
+            <a:endParaRPr lang="en-US" sz="1450" dirty="0"/>
+          </a:p>
+        </p:txBody>
+      </p:sp>
+      <p:sp>
+        <p:nvSpPr>
+          <p:cNvPr id="11" name="Text 9"/>
+          <p:cNvSpPr/>
+          <p:nvPr/>
+        </p:nvSpPr>
+        <p:spPr>
+          <a:xfrm>
+            <a:off x="2507833" y="3200400"/>
+            <a:ext cx="1572768" cy="411480"/>
+          </a:xfrm>
+          <a:prstGeom prst="rect">
+            <a:avLst/>
+          </a:prstGeom>
+          <a:noFill/>
+          <a:ln/>
+        </p:spPr>
+        <p:txBody>
+          <a:bodyPr wrap="square" lIns="0" tIns="0" rIns="0" bIns="0" rtlCol="0" anchor="t"/>
           <a:lstStyle/>
           <a:p>
             <a:pPr algn="ctr" indent="0" marL="0">
               <a:buNone/>
             </a:pPr>
             <a:r>
-              <a:rPr lang="en-US" sz="1000" dirty="0">
+              <a:rPr lang="en-US" sz="1050" dirty="0">
                 <a:solidFill>
                   <a:srgbClr val="6E6146"/>
                 </a:solidFill>
@@ -1774,155 +1877,50 @@
                 <a:ea typeface="Calibri" pitchFamily="34" charset="-122"/>
                 <a:cs typeface="Calibri" pitchFamily="34" charset="-120"/>
               </a:rPr>
-              <a:t>10 · 2 arrays · 5 metrics</a:t>
-            </a:r>
-            <a:endParaRPr lang="en-US" sz="1000" dirty="0"/>
-          </a:p>
-        </p:txBody>
-      </p:sp>
-      <p:sp>
-        <p:nvSpPr>
-          <p:cNvPr id="8" name="Shape 6"/>
-          <p:cNvSpPr/>
-          <p:nvPr/>
-        </p:nvSpPr>
-        <p:spPr>
-          <a:xfrm>
-            <a:off x="914400" y="3520440"/>
-            <a:ext cx="2651760" cy="1005840"/>
-          </a:xfrm>
-          <a:prstGeom prst="roundRect">
-            <a:avLst>
-              <a:gd name="adj" fmla="val 7273"/>
-            </a:avLst>
-          </a:prstGeom>
-          <a:solidFill>
-            <a:srgbClr val="FFFFFF"/>
-          </a:solidFill>
-          <a:ln w="15240">
+              <a:t>windows · alerts</a:t>
+            </a:r>
+            <a:endParaRPr lang="en-US" sz="1050" dirty="0"/>
+          </a:p>
+        </p:txBody>
+      </p:sp>
+      <p:sp>
+        <p:nvSpPr>
+          <p:cNvPr id="12" name="Shape 10"/>
+          <p:cNvSpPr/>
+          <p:nvPr/>
+        </p:nvSpPr>
+        <p:spPr>
+          <a:xfrm>
+            <a:off x="4098889" y="3154680"/>
+            <a:ext cx="258409" cy="0"/>
+          </a:xfrm>
+          <a:prstGeom prst="line">
+            <a:avLst/>
+          </a:prstGeom>
+          <a:noFill/>
+          <a:ln w="25400">
             <a:solidFill>
               <a:srgbClr val="D8A94E"/>
             </a:solidFill>
             <a:prstDash val="solid"/>
-          </a:ln>
-        </p:spPr>
-      </p:sp>
-      <p:sp>
-        <p:nvSpPr>
-          <p:cNvPr id="9" name="Text 7"/>
-          <p:cNvSpPr/>
-          <p:nvPr/>
-        </p:nvSpPr>
-        <p:spPr>
-          <a:xfrm>
-            <a:off x="914400" y="3666744"/>
-            <a:ext cx="2651760" cy="365760"/>
-          </a:xfrm>
-          <a:prstGeom prst="rect">
-            <a:avLst/>
-          </a:prstGeom>
-          <a:noFill/>
-          <a:ln/>
-        </p:spPr>
-        <p:txBody>
-          <a:bodyPr wrap="square" lIns="0" tIns="0" rIns="0" bIns="0" rtlCol="0" anchor="ctr"/>
-          <a:lstStyle/>
-          <a:p>
-            <a:pPr algn="ctr" indent="0" marL="0">
-              <a:buNone/>
-            </a:pPr>
-            <a:r>
-              <a:rPr lang="en-US" sz="1400" b="1" dirty="0">
-                <a:solidFill>
-                  <a:srgbClr val="281F10"/>
-                </a:solidFill>
-                <a:latin typeface="Calibri" pitchFamily="34" charset="0"/>
-                <a:ea typeface="Calibri" pitchFamily="34" charset="-122"/>
-                <a:cs typeface="Calibri" pitchFamily="34" charset="-120"/>
-              </a:rPr>
-              <a:t>Fog node</a:t>
-            </a:r>
-            <a:endParaRPr lang="en-US" sz="1400" dirty="0"/>
-          </a:p>
-        </p:txBody>
-      </p:sp>
-      <p:sp>
-        <p:nvSpPr>
-          <p:cNvPr id="10" name="Text 8"/>
-          <p:cNvSpPr/>
-          <p:nvPr/>
-        </p:nvSpPr>
-        <p:spPr>
-          <a:xfrm>
-            <a:off x="914400" y="4050792"/>
-            <a:ext cx="2651760" cy="365760"/>
-          </a:xfrm>
-          <a:prstGeom prst="rect">
-            <a:avLst/>
-          </a:prstGeom>
-          <a:noFill/>
-          <a:ln/>
-        </p:spPr>
-        <p:txBody>
-          <a:bodyPr wrap="square" lIns="0" tIns="0" rIns="0" bIns="0" rtlCol="0" anchor="ctr"/>
-          <a:lstStyle/>
-          <a:p>
-            <a:pPr algn="ctr" indent="0" marL="0">
-              <a:buNone/>
-            </a:pPr>
-            <a:r>
-              <a:rPr lang="en-US" sz="1000" dirty="0">
-                <a:solidFill>
-                  <a:srgbClr val="6E6146"/>
-                </a:solidFill>
-                <a:latin typeface="Calibri" pitchFamily="34" charset="0"/>
-                <a:ea typeface="Calibri" pitchFamily="34" charset="-122"/>
-                <a:cs typeface="Calibri" pitchFamily="34" charset="-120"/>
-              </a:rPr>
-              <a:t>windows · alerts</a:t>
-            </a:r>
-            <a:endParaRPr lang="en-US" sz="1000" dirty="0"/>
-          </a:p>
-        </p:txBody>
-      </p:sp>
-      <p:sp>
-        <p:nvSpPr>
-          <p:cNvPr id="11" name="Shape 9"/>
-          <p:cNvSpPr/>
-          <p:nvPr/>
-        </p:nvSpPr>
-        <p:spPr>
-          <a:xfrm>
-            <a:off x="3886200" y="3246120"/>
-            <a:ext cx="502920" cy="0"/>
-          </a:xfrm>
-          <a:prstGeom prst="line">
-            <a:avLst/>
-          </a:prstGeom>
-          <a:noFill/>
-          <a:ln w="31750">
-            <a:solidFill>
-              <a:srgbClr val="8A5A16"/>
-            </a:solidFill>
-            <a:prstDash val="solid"/>
             <a:tailEnd type="triangle"/>
           </a:ln>
         </p:spPr>
       </p:sp>
       <p:sp>
         <p:nvSpPr>
-          <p:cNvPr id="12" name="Shape 10"/>
-          <p:cNvSpPr/>
-          <p:nvPr/>
-        </p:nvSpPr>
-        <p:spPr>
-          <a:xfrm>
-            <a:off x="4572000" y="1554480"/>
-            <a:ext cx="6949440" cy="3383280"/>
+          <p:cNvPr id="13" name="Shape 11"/>
+          <p:cNvSpPr/>
+          <p:nvPr/>
+        </p:nvSpPr>
+        <p:spPr>
+          <a:xfrm>
+            <a:off x="4375587" y="2468880"/>
+            <a:ext cx="1572768" cy="1371600"/>
           </a:xfrm>
           <a:prstGeom prst="roundRect">
             <a:avLst>
-              <a:gd name="adj" fmla="val 2703"/>
+              <a:gd name="adj" fmla="val 6667"/>
             </a:avLst>
           </a:prstGeom>
           <a:solidFill>
@@ -1938,145 +1936,99 @@
       </p:sp>
       <p:sp>
         <p:nvSpPr>
-          <p:cNvPr id="13" name="Text 11"/>
-          <p:cNvSpPr/>
-          <p:nvPr/>
-        </p:nvSpPr>
-        <p:spPr>
-          <a:xfrm>
-            <a:off x="4572000" y="1691640"/>
-            <a:ext cx="6949440" cy="365760"/>
-          </a:xfrm>
-          <a:prstGeom prst="rect">
-            <a:avLst/>
-          </a:prstGeom>
-          <a:noFill/>
-          <a:ln/>
-        </p:spPr>
-        <p:txBody>
-          <a:bodyPr wrap="square" rtlCol="0" anchor="ctr"/>
+          <p:cNvPr id="14" name="Shape 12"/>
+          <p:cNvSpPr/>
+          <p:nvPr/>
+        </p:nvSpPr>
+        <p:spPr>
+          <a:xfrm>
+            <a:off x="5070531" y="2633472"/>
+            <a:ext cx="182880" cy="182880"/>
+          </a:xfrm>
+          <a:prstGeom prst="ellipse">
+            <a:avLst/>
+          </a:prstGeom>
+          <a:solidFill>
+            <a:srgbClr val="8A5A16"/>
+          </a:solidFill>
+          <a:ln/>
+        </p:spPr>
+      </p:sp>
+      <p:sp>
+        <p:nvSpPr>
+          <p:cNvPr id="15" name="Text 13"/>
+          <p:cNvSpPr/>
+          <p:nvPr/>
+        </p:nvSpPr>
+        <p:spPr>
+          <a:xfrm>
+            <a:off x="4348155" y="2852928"/>
+            <a:ext cx="1627632" cy="365760"/>
+          </a:xfrm>
+          <a:prstGeom prst="rect">
+            <a:avLst/>
+          </a:prstGeom>
+          <a:noFill/>
+          <a:ln/>
+        </p:spPr>
+        <p:txBody>
+          <a:bodyPr wrap="square" lIns="0" tIns="0" rIns="0" bIns="0" rtlCol="0" anchor="ctr"/>
           <a:lstStyle/>
           <a:p>
             <a:pPr algn="ctr" indent="0" marL="0">
               <a:buNone/>
             </a:pPr>
             <a:r>
-              <a:rPr lang="en-US" sz="1200" b="1" spc="200" kern="0" dirty="0">
-                <a:solidFill>
-                  <a:srgbClr val="8A5A16"/>
+              <a:rPr lang="en-US" sz="1450" b="1" dirty="0">
+                <a:solidFill>
+                  <a:srgbClr val="281F10"/>
                 </a:solidFill>
                 <a:latin typeface="Calibri" pitchFamily="34" charset="0"/>
                 <a:ea typeface="Calibri" pitchFamily="34" charset="-122"/>
                 <a:cs typeface="Calibri" pitchFamily="34" charset="-120"/>
               </a:rPr>
-              <a:t>CLOUD (serverless)</a:t>
-            </a:r>
-            <a:endParaRPr lang="en-US" sz="1200" dirty="0"/>
-          </a:p>
-        </p:txBody>
-      </p:sp>
-      <p:sp>
-        <p:nvSpPr>
-          <p:cNvPr id="14" name="Shape 12"/>
-          <p:cNvSpPr/>
-          <p:nvPr/>
-        </p:nvSpPr>
-        <p:spPr>
-          <a:xfrm>
-            <a:off x="4846320" y="2651760"/>
-            <a:ext cx="1463040" cy="1371600"/>
-          </a:xfrm>
-          <a:prstGeom prst="roundRect">
-            <a:avLst>
-              <a:gd name="adj" fmla="val 5333"/>
-            </a:avLst>
-          </a:prstGeom>
-          <a:solidFill>
-            <a:srgbClr val="FFFFFF"/>
-          </a:solidFill>
-          <a:ln w="15240">
-            <a:solidFill>
-              <a:srgbClr val="8A5A16"/>
-            </a:solidFill>
-            <a:prstDash val="solid"/>
-          </a:ln>
-        </p:spPr>
-      </p:sp>
-      <p:sp>
-        <p:nvSpPr>
-          <p:cNvPr id="15" name="Text 13"/>
-          <p:cNvSpPr/>
-          <p:nvPr/>
-        </p:nvSpPr>
-        <p:spPr>
-          <a:xfrm>
-            <a:off x="4800600" y="2907792"/>
-            <a:ext cx="1554480" cy="457200"/>
-          </a:xfrm>
-          <a:prstGeom prst="rect">
-            <a:avLst/>
-          </a:prstGeom>
-          <a:noFill/>
-          <a:ln/>
-        </p:spPr>
-        <p:txBody>
-          <a:bodyPr wrap="square" lIns="0" tIns="0" rIns="0" bIns="0" rtlCol="0" anchor="ctr"/>
+              <a:t>Amazon SQS</a:t>
+            </a:r>
+            <a:endParaRPr lang="en-US" sz="1450" dirty="0"/>
+          </a:p>
+        </p:txBody>
+      </p:sp>
+      <p:sp>
+        <p:nvSpPr>
+          <p:cNvPr id="16" name="Text 14"/>
+          <p:cNvSpPr/>
+          <p:nvPr/>
+        </p:nvSpPr>
+        <p:spPr>
+          <a:xfrm>
+            <a:off x="4375587" y="3200400"/>
+            <a:ext cx="1572768" cy="411480"/>
+          </a:xfrm>
+          <a:prstGeom prst="rect">
+            <a:avLst/>
+          </a:prstGeom>
+          <a:noFill/>
+          <a:ln/>
+        </p:spPr>
+        <p:txBody>
+          <a:bodyPr wrap="square" lIns="0" tIns="0" rIns="0" bIns="0" rtlCol="0" anchor="t"/>
           <a:lstStyle/>
           <a:p>
             <a:pPr algn="ctr" indent="0" marL="0">
               <a:buNone/>
             </a:pPr>
             <a:r>
-              <a:rPr lang="en-US" sz="1250" b="1" dirty="0">
-                <a:solidFill>
-                  <a:srgbClr val="281F10"/>
+              <a:rPr lang="en-US" sz="1050" dirty="0">
+                <a:solidFill>
+                  <a:srgbClr val="6E6146"/>
                 </a:solidFill>
                 <a:latin typeface="Calibri" pitchFamily="34" charset="0"/>
                 <a:ea typeface="Calibri" pitchFamily="34" charset="-122"/>
                 <a:cs typeface="Calibri" pitchFamily="34" charset="-120"/>
               </a:rPr>
-              <a:t>Amazon SQS</a:t>
-            </a:r>
-            <a:endParaRPr lang="en-US" sz="1250" dirty="0"/>
-          </a:p>
-        </p:txBody>
-      </p:sp>
-      <p:sp>
-        <p:nvSpPr>
-          <p:cNvPr id="16" name="Text 14"/>
-          <p:cNvSpPr/>
-          <p:nvPr/>
-        </p:nvSpPr>
-        <p:spPr>
-          <a:xfrm>
-            <a:off x="4828032" y="3401568"/>
-            <a:ext cx="1499616" cy="457200"/>
-          </a:xfrm>
-          <a:prstGeom prst="rect">
-            <a:avLst/>
-          </a:prstGeom>
-          <a:noFill/>
-          <a:ln/>
-        </p:spPr>
-        <p:txBody>
-          <a:bodyPr wrap="square" lIns="0" tIns="0" rIns="0" bIns="0" rtlCol="0" anchor="ctr"/>
-          <a:lstStyle/>
-          <a:p>
-            <a:pPr algn="ctr" indent="0" marL="0">
-              <a:buNone/>
-            </a:pPr>
-            <a:r>
-              <a:rPr lang="en-US" sz="900" dirty="0">
-                <a:solidFill>
-                  <a:srgbClr val="6E6146"/>
-                </a:solidFill>
-                <a:latin typeface="Calibri" pitchFamily="34" charset="0"/>
-                <a:ea typeface="Calibri" pitchFamily="34" charset="-122"/>
-                <a:cs typeface="Calibri" pitchFamily="34" charset="-120"/>
-              </a:rPr>
               <a:t>window summaries</a:t>
             </a:r>
-            <a:endParaRPr lang="en-US" sz="900" dirty="0"/>
+            <a:endParaRPr lang="en-US" sz="1050" dirty="0"/>
           </a:p>
         </p:txBody>
       </p:sp>
@@ -2088,14 +2040,14 @@
         </p:nvSpPr>
         <p:spPr>
           <a:xfrm>
-            <a:off x="6318504" y="3337560"/>
-            <a:ext cx="164592" cy="0"/>
+            <a:off x="5966643" y="3154680"/>
+            <a:ext cx="258409" cy="0"/>
           </a:xfrm>
           <a:prstGeom prst="line">
             <a:avLst/>
           </a:prstGeom>
           <a:noFill/>
-          <a:ln w="20320">
+          <a:ln w="25400">
             <a:solidFill>
               <a:srgbClr val="D8A94E"/>
             </a:solidFill>
@@ -2112,18 +2064,18 @@
         </p:nvSpPr>
         <p:spPr>
           <a:xfrm>
-            <a:off x="6492240" y="2651760"/>
-            <a:ext cx="1463040" cy="1371600"/>
+            <a:off x="6243340" y="2468880"/>
+            <a:ext cx="1572768" cy="1371600"/>
           </a:xfrm>
           <a:prstGeom prst="roundRect">
             <a:avLst>
-              <a:gd name="adj" fmla="val 5333"/>
+              <a:gd name="adj" fmla="val 6667"/>
             </a:avLst>
           </a:prstGeom>
           <a:solidFill>
-            <a:srgbClr val="FFFFFF"/>
-          </a:solidFill>
-          <a:ln w="15240">
+            <a:srgbClr val="F7F1E4"/>
+          </a:solidFill>
+          <a:ln w="19050">
             <a:solidFill>
               <a:srgbClr val="8A5A16"/>
             </a:solidFill>
@@ -2133,14 +2085,34 @@
       </p:sp>
       <p:sp>
         <p:nvSpPr>
-          <p:cNvPr id="19" name="Text 17"/>
-          <p:cNvSpPr/>
-          <p:nvPr/>
-        </p:nvSpPr>
-        <p:spPr>
-          <a:xfrm>
-            <a:off x="6446520" y="2907792"/>
-            <a:ext cx="1554480" cy="457200"/>
+          <p:cNvPr id="19" name="Shape 17"/>
+          <p:cNvSpPr/>
+          <p:nvPr/>
+        </p:nvSpPr>
+        <p:spPr>
+          <a:xfrm>
+            <a:off x="6938284" y="2633472"/>
+            <a:ext cx="182880" cy="182880"/>
+          </a:xfrm>
+          <a:prstGeom prst="ellipse">
+            <a:avLst/>
+          </a:prstGeom>
+          <a:solidFill>
+            <a:srgbClr val="8A5A16"/>
+          </a:solidFill>
+          <a:ln/>
+        </p:spPr>
+      </p:sp>
+      <p:sp>
+        <p:nvSpPr>
+          <p:cNvPr id="20" name="Text 18"/>
+          <p:cNvSpPr/>
+          <p:nvPr/>
+        </p:nvSpPr>
+        <p:spPr>
+          <a:xfrm>
+            <a:off x="6215908" y="2852928"/>
+            <a:ext cx="1627632" cy="365760"/>
           </a:xfrm>
           <a:prstGeom prst="rect">
             <a:avLst/>
@@ -2156,7 +2128,7 @@
               <a:buNone/>
             </a:pPr>
             <a:r>
-              <a:rPr lang="en-US" sz="1250" b="1" dirty="0">
+              <a:rPr lang="en-US" sz="1450" b="1" dirty="0">
                 <a:solidFill>
                   <a:srgbClr val="281F10"/>
                 </a:solidFill>
@@ -2166,36 +2138,36 @@
               </a:rPr>
               <a:t>AWS Lambda</a:t>
             </a:r>
-            <a:endParaRPr lang="en-US" sz="1250" dirty="0"/>
-          </a:p>
-        </p:txBody>
-      </p:sp>
-      <p:sp>
-        <p:nvSpPr>
-          <p:cNvPr id="20" name="Text 18"/>
-          <p:cNvSpPr/>
-          <p:nvPr/>
-        </p:nvSpPr>
-        <p:spPr>
-          <a:xfrm>
-            <a:off x="6473952" y="3401568"/>
-            <a:ext cx="1499616" cy="457200"/>
-          </a:xfrm>
-          <a:prstGeom prst="rect">
-            <a:avLst/>
-          </a:prstGeom>
-          <a:noFill/>
-          <a:ln/>
-        </p:spPr>
-        <p:txBody>
-          <a:bodyPr wrap="square" lIns="0" tIns="0" rIns="0" bIns="0" rtlCol="0" anchor="ctr"/>
+            <a:endParaRPr lang="en-US" sz="1450" dirty="0"/>
+          </a:p>
+        </p:txBody>
+      </p:sp>
+      <p:sp>
+        <p:nvSpPr>
+          <p:cNvPr id="21" name="Text 19"/>
+          <p:cNvSpPr/>
+          <p:nvPr/>
+        </p:nvSpPr>
+        <p:spPr>
+          <a:xfrm>
+            <a:off x="6243340" y="3200400"/>
+            <a:ext cx="1572768" cy="411480"/>
+          </a:xfrm>
+          <a:prstGeom prst="rect">
+            <a:avLst/>
+          </a:prstGeom>
+          <a:noFill/>
+          <a:ln/>
+        </p:spPr>
+        <p:txBody>
+          <a:bodyPr wrap="square" lIns="0" tIns="0" rIns="0" bIns="0" rtlCol="0" anchor="t"/>
           <a:lstStyle/>
           <a:p>
             <a:pPr algn="ctr" indent="0" marL="0">
               <a:buNone/>
             </a:pPr>
             <a:r>
-              <a:rPr lang="en-US" sz="900" dirty="0">
+              <a:rPr lang="en-US" sz="1050" dirty="0">
                 <a:solidFill>
                   <a:srgbClr val="6E6146"/>
                 </a:solidFill>
@@ -2205,26 +2177,26 @@
               </a:rPr>
               <a:t>python3.12 ingest</a:t>
             </a:r>
-            <a:endParaRPr lang="en-US" sz="900" dirty="0"/>
-          </a:p>
-        </p:txBody>
-      </p:sp>
-      <p:sp>
-        <p:nvSpPr>
-          <p:cNvPr id="21" name="Shape 19"/>
-          <p:cNvSpPr/>
-          <p:nvPr/>
-        </p:nvSpPr>
-        <p:spPr>
-          <a:xfrm>
-            <a:off x="7964424" y="3337560"/>
-            <a:ext cx="164592" cy="0"/>
+            <a:endParaRPr lang="en-US" sz="1050" dirty="0"/>
+          </a:p>
+        </p:txBody>
+      </p:sp>
+      <p:sp>
+        <p:nvSpPr>
+          <p:cNvPr id="22" name="Shape 20"/>
+          <p:cNvSpPr/>
+          <p:nvPr/>
+        </p:nvSpPr>
+        <p:spPr>
+          <a:xfrm>
+            <a:off x="7834396" y="3154680"/>
+            <a:ext cx="258409" cy="0"/>
           </a:xfrm>
           <a:prstGeom prst="line">
             <a:avLst/>
           </a:prstGeom>
           <a:noFill/>
-          <a:ln w="20320">
+          <a:ln w="25400">
             <a:solidFill>
               <a:srgbClr val="D8A94E"/>
             </a:solidFill>
@@ -2235,24 +2207,24 @@
       </p:sp>
       <p:sp>
         <p:nvSpPr>
-          <p:cNvPr id="22" name="Shape 20"/>
-          <p:cNvSpPr/>
-          <p:nvPr/>
-        </p:nvSpPr>
-        <p:spPr>
-          <a:xfrm>
-            <a:off x="8138160" y="2651760"/>
-            <a:ext cx="1463040" cy="1371600"/>
+          <p:cNvPr id="23" name="Shape 21"/>
+          <p:cNvSpPr/>
+          <p:nvPr/>
+        </p:nvSpPr>
+        <p:spPr>
+          <a:xfrm>
+            <a:off x="8111094" y="2468880"/>
+            <a:ext cx="1572768" cy="1371600"/>
           </a:xfrm>
           <a:prstGeom prst="roundRect">
             <a:avLst>
-              <a:gd name="adj" fmla="val 5333"/>
+              <a:gd name="adj" fmla="val 6667"/>
             </a:avLst>
           </a:prstGeom>
           <a:solidFill>
-            <a:srgbClr val="FFFFFF"/>
-          </a:solidFill>
-          <a:ln w="15240">
+            <a:srgbClr val="F7F1E4"/>
+          </a:solidFill>
+          <a:ln w="19050">
             <a:solidFill>
               <a:srgbClr val="8A5A16"/>
             </a:solidFill>
@@ -2262,14 +2234,34 @@
       </p:sp>
       <p:sp>
         <p:nvSpPr>
-          <p:cNvPr id="23" name="Text 21"/>
-          <p:cNvSpPr/>
-          <p:nvPr/>
-        </p:nvSpPr>
-        <p:spPr>
-          <a:xfrm>
-            <a:off x="8092440" y="2907792"/>
-            <a:ext cx="1554480" cy="457200"/>
+          <p:cNvPr id="24" name="Shape 22"/>
+          <p:cNvSpPr/>
+          <p:nvPr/>
+        </p:nvSpPr>
+        <p:spPr>
+          <a:xfrm>
+            <a:off x="8806038" y="2633472"/>
+            <a:ext cx="182880" cy="182880"/>
+          </a:xfrm>
+          <a:prstGeom prst="ellipse">
+            <a:avLst/>
+          </a:prstGeom>
+          <a:solidFill>
+            <a:srgbClr val="8A5A16"/>
+          </a:solidFill>
+          <a:ln/>
+        </p:spPr>
+      </p:sp>
+      <p:sp>
+        <p:nvSpPr>
+          <p:cNvPr id="25" name="Text 23"/>
+          <p:cNvSpPr/>
+          <p:nvPr/>
+        </p:nvSpPr>
+        <p:spPr>
+          <a:xfrm>
+            <a:off x="8083662" y="2852928"/>
+            <a:ext cx="1627632" cy="365760"/>
           </a:xfrm>
           <a:prstGeom prst="rect">
             <a:avLst/>
@@ -2285,7 +2277,7 @@
               <a:buNone/>
             </a:pPr>
             <a:r>
-              <a:rPr lang="en-US" sz="1250" b="1" dirty="0">
+              <a:rPr lang="en-US" sz="1450" b="1" dirty="0">
                 <a:solidFill>
                   <a:srgbClr val="281F10"/>
                 </a:solidFill>
@@ -2295,36 +2287,36 @@
               </a:rPr>
               <a:t>DynamoDB</a:t>
             </a:r>
-            <a:endParaRPr lang="en-US" sz="1250" dirty="0"/>
-          </a:p>
-        </p:txBody>
-      </p:sp>
-      <p:sp>
-        <p:nvSpPr>
-          <p:cNvPr id="24" name="Text 22"/>
-          <p:cNvSpPr/>
-          <p:nvPr/>
-        </p:nvSpPr>
-        <p:spPr>
-          <a:xfrm>
-            <a:off x="8119872" y="3401568"/>
-            <a:ext cx="1499616" cy="457200"/>
-          </a:xfrm>
-          <a:prstGeom prst="rect">
-            <a:avLst/>
-          </a:prstGeom>
-          <a:noFill/>
-          <a:ln/>
-        </p:spPr>
-        <p:txBody>
-          <a:bodyPr wrap="square" lIns="0" tIns="0" rIns="0" bIns="0" rtlCol="0" anchor="ctr"/>
+            <a:endParaRPr lang="en-US" sz="1450" dirty="0"/>
+          </a:p>
+        </p:txBody>
+      </p:sp>
+      <p:sp>
+        <p:nvSpPr>
+          <p:cNvPr id="26" name="Text 24"/>
+          <p:cNvSpPr/>
+          <p:nvPr/>
+        </p:nvSpPr>
+        <p:spPr>
+          <a:xfrm>
+            <a:off x="8111094" y="3200400"/>
+            <a:ext cx="1572768" cy="411480"/>
+          </a:xfrm>
+          <a:prstGeom prst="rect">
+            <a:avLst/>
+          </a:prstGeom>
+          <a:noFill/>
+          <a:ln/>
+        </p:spPr>
+        <p:txBody>
+          <a:bodyPr wrap="square" lIns="0" tIns="0" rIns="0" bIns="0" rtlCol="0" anchor="t"/>
           <a:lstStyle/>
           <a:p>
             <a:pPr algn="ctr" indent="0" marL="0">
               <a:buNone/>
             </a:pPr>
             <a:r>
-              <a:rPr lang="en-US" sz="900" dirty="0">
+              <a:rPr lang="en-US" sz="1050" dirty="0">
                 <a:solidFill>
                   <a:srgbClr val="6E6146"/>
                 </a:solidFill>
@@ -2334,26 +2326,26 @@
               </a:rPr>
               <a:t>by array · sensor</a:t>
             </a:r>
-            <a:endParaRPr lang="en-US" sz="900" dirty="0"/>
-          </a:p>
-        </p:txBody>
-      </p:sp>
-      <p:sp>
-        <p:nvSpPr>
-          <p:cNvPr id="25" name="Shape 23"/>
-          <p:cNvSpPr/>
-          <p:nvPr/>
-        </p:nvSpPr>
-        <p:spPr>
-          <a:xfrm>
-            <a:off x="9610344" y="3337560"/>
-            <a:ext cx="164592" cy="0"/>
+            <a:endParaRPr lang="en-US" sz="1050" dirty="0"/>
+          </a:p>
+        </p:txBody>
+      </p:sp>
+      <p:sp>
+        <p:nvSpPr>
+          <p:cNvPr id="27" name="Shape 25"/>
+          <p:cNvSpPr/>
+          <p:nvPr/>
+        </p:nvSpPr>
+        <p:spPr>
+          <a:xfrm>
+            <a:off x="9702150" y="3154680"/>
+            <a:ext cx="258409" cy="0"/>
           </a:xfrm>
           <a:prstGeom prst="line">
             <a:avLst/>
           </a:prstGeom>
           <a:noFill/>
-          <a:ln w="20320">
+          <a:ln w="25400">
             <a:solidFill>
               <a:srgbClr val="D8A94E"/>
             </a:solidFill>
@@ -2364,24 +2356,24 @@
       </p:sp>
       <p:sp>
         <p:nvSpPr>
-          <p:cNvPr id="26" name="Shape 24"/>
-          <p:cNvSpPr/>
-          <p:nvPr/>
-        </p:nvSpPr>
-        <p:spPr>
-          <a:xfrm>
-            <a:off x="9784080" y="2651760"/>
-            <a:ext cx="1463040" cy="1371600"/>
+          <p:cNvPr id="28" name="Shape 26"/>
+          <p:cNvSpPr/>
+          <p:nvPr/>
+        </p:nvSpPr>
+        <p:spPr>
+          <a:xfrm>
+            <a:off x="9978847" y="2468880"/>
+            <a:ext cx="1572768" cy="1371600"/>
           </a:xfrm>
           <a:prstGeom prst="roundRect">
             <a:avLst>
-              <a:gd name="adj" fmla="val 5333"/>
+              <a:gd name="adj" fmla="val 6667"/>
             </a:avLst>
           </a:prstGeom>
           <a:solidFill>
-            <a:srgbClr val="FFFFFF"/>
-          </a:solidFill>
-          <a:ln w="15240">
+            <a:srgbClr val="F7F1E4"/>
+          </a:solidFill>
+          <a:ln w="19050">
             <a:solidFill>
               <a:srgbClr val="B9822A"/>
             </a:solidFill>
@@ -2391,14 +2383,34 @@
       </p:sp>
       <p:sp>
         <p:nvSpPr>
-          <p:cNvPr id="27" name="Text 25"/>
-          <p:cNvSpPr/>
-          <p:nvPr/>
-        </p:nvSpPr>
-        <p:spPr>
-          <a:xfrm>
-            <a:off x="9738360" y="2907792"/>
-            <a:ext cx="1554480" cy="457200"/>
+          <p:cNvPr id="29" name="Shape 27"/>
+          <p:cNvSpPr/>
+          <p:nvPr/>
+        </p:nvSpPr>
+        <p:spPr>
+          <a:xfrm>
+            <a:off x="10673791" y="2633472"/>
+            <a:ext cx="182880" cy="182880"/>
+          </a:xfrm>
+          <a:prstGeom prst="ellipse">
+            <a:avLst/>
+          </a:prstGeom>
+          <a:solidFill>
+            <a:srgbClr val="B9822A"/>
+          </a:solidFill>
+          <a:ln/>
+        </p:spPr>
+      </p:sp>
+      <p:sp>
+        <p:nvSpPr>
+          <p:cNvPr id="30" name="Text 28"/>
+          <p:cNvSpPr/>
+          <p:nvPr/>
+        </p:nvSpPr>
+        <p:spPr>
+          <a:xfrm>
+            <a:off x="9951415" y="2852928"/>
+            <a:ext cx="1627632" cy="365760"/>
           </a:xfrm>
           <a:prstGeom prst="rect">
             <a:avLst/>
@@ -2414,7 +2426,7 @@
               <a:buNone/>
             </a:pPr>
             <a:r>
-              <a:rPr lang="en-US" sz="1250" b="1" dirty="0">
+              <a:rPr lang="en-US" sz="1450" b="1" dirty="0">
                 <a:solidFill>
                   <a:srgbClr val="281F10"/>
                 </a:solidFill>
@@ -2424,36 +2436,36 @@
               </a:rPr>
               <a:t>API GW + S3</a:t>
             </a:r>
-            <a:endParaRPr lang="en-US" sz="1250" dirty="0"/>
-          </a:p>
-        </p:txBody>
-      </p:sp>
-      <p:sp>
-        <p:nvSpPr>
-          <p:cNvPr id="28" name="Text 26"/>
-          <p:cNvSpPr/>
-          <p:nvPr/>
-        </p:nvSpPr>
-        <p:spPr>
-          <a:xfrm>
-            <a:off x="9765792" y="3401568"/>
-            <a:ext cx="1499616" cy="457200"/>
-          </a:xfrm>
-          <a:prstGeom prst="rect">
-            <a:avLst/>
-          </a:prstGeom>
-          <a:noFill/>
-          <a:ln/>
-        </p:spPr>
-        <p:txBody>
-          <a:bodyPr wrap="square" lIns="0" tIns="0" rIns="0" bIns="0" rtlCol="0" anchor="ctr"/>
+            <a:endParaRPr lang="en-US" sz="1450" dirty="0"/>
+          </a:p>
+        </p:txBody>
+      </p:sp>
+      <p:sp>
+        <p:nvSpPr>
+          <p:cNvPr id="31" name="Text 29"/>
+          <p:cNvSpPr/>
+          <p:nvPr/>
+        </p:nvSpPr>
+        <p:spPr>
+          <a:xfrm>
+            <a:off x="9978847" y="3200400"/>
+            <a:ext cx="1572768" cy="411480"/>
+          </a:xfrm>
+          <a:prstGeom prst="rect">
+            <a:avLst/>
+          </a:prstGeom>
+          <a:noFill/>
+          <a:ln/>
+        </p:spPr>
+        <p:txBody>
+          <a:bodyPr wrap="square" lIns="0" tIns="0" rIns="0" bIns="0" rtlCol="0" anchor="t"/>
           <a:lstStyle/>
           <a:p>
             <a:pPr algn="ctr" indent="0" marL="0">
               <a:buNone/>
             </a:pPr>
             <a:r>
-              <a:rPr lang="en-US" sz="900" dirty="0">
+              <a:rPr lang="en-US" sz="1050" dirty="0">
                 <a:solidFill>
                   <a:srgbClr val="6E6146"/>
                 </a:solidFill>
@@ -2463,13 +2475,91 @@
               </a:rPr>
               <a:t>efficiency heatmap</a:t>
             </a:r>
-            <a:endParaRPr lang="en-US" sz="900" dirty="0"/>
-          </a:p>
-        </p:txBody>
-      </p:sp>
-      <p:sp>
-        <p:nvSpPr>
-          <p:cNvPr id="29" name="Text 27"/>
+            <a:endParaRPr lang="en-US" sz="1050" dirty="0"/>
+          </a:p>
+        </p:txBody>
+      </p:sp>
+      <p:sp>
+        <p:nvSpPr>
+          <p:cNvPr id="32" name="Text 30"/>
+          <p:cNvSpPr/>
+          <p:nvPr/>
+        </p:nvSpPr>
+        <p:spPr>
+          <a:xfrm>
+            <a:off x="640080" y="3977640"/>
+            <a:ext cx="3440521" cy="274320"/>
+          </a:xfrm>
+          <a:prstGeom prst="rect">
+            <a:avLst/>
+          </a:prstGeom>
+          <a:noFill/>
+          <a:ln/>
+        </p:spPr>
+        <p:txBody>
+          <a:bodyPr wrap="square" rtlCol="0" anchor="ctr"/>
+          <a:lstStyle/>
+          <a:p>
+            <a:pPr algn="ctr" indent="0" marL="0">
+              <a:buNone/>
+            </a:pPr>
+            <a:r>
+              <a:rPr lang="en-US" sz="1100" b="1" spc="200" kern="0" dirty="0">
+                <a:solidFill>
+                  <a:srgbClr val="D8A94E"/>
+                </a:solidFill>
+                <a:latin typeface="Calibri" pitchFamily="34" charset="0"/>
+                <a:ea typeface="Calibri" pitchFamily="34" charset="-122"/>
+                <a:cs typeface="Calibri" pitchFamily="34" charset="-120"/>
+              </a:rPr>
+              <a:t>EDGE</a:t>
+            </a:r>
+            <a:endParaRPr lang="en-US" sz="1100" dirty="0"/>
+          </a:p>
+        </p:txBody>
+      </p:sp>
+      <p:sp>
+        <p:nvSpPr>
+          <p:cNvPr id="33" name="Text 31"/>
+          <p:cNvSpPr/>
+          <p:nvPr/>
+        </p:nvSpPr>
+        <p:spPr>
+          <a:xfrm>
+            <a:off x="4375587" y="3977640"/>
+            <a:ext cx="7176028" cy="274320"/>
+          </a:xfrm>
+          <a:prstGeom prst="rect">
+            <a:avLst/>
+          </a:prstGeom>
+          <a:noFill/>
+          <a:ln/>
+        </p:spPr>
+        <p:txBody>
+          <a:bodyPr wrap="square" rtlCol="0" anchor="ctr"/>
+          <a:lstStyle/>
+          <a:p>
+            <a:pPr algn="ctr" indent="0" marL="0">
+              <a:buNone/>
+            </a:pPr>
+            <a:r>
+              <a:rPr lang="en-US" sz="1100" b="1" spc="200" kern="0" dirty="0">
+                <a:solidFill>
+                  <a:srgbClr val="8A5A16"/>
+                </a:solidFill>
+                <a:latin typeface="Calibri" pitchFamily="34" charset="0"/>
+                <a:ea typeface="Calibri" pitchFamily="34" charset="-122"/>
+                <a:cs typeface="Calibri" pitchFamily="34" charset="-120"/>
+              </a:rPr>
+              <a:t>CLOUD</a:t>
+            </a:r>
+            <a:endParaRPr lang="en-US" sz="1100" dirty="0"/>
+          </a:p>
+        </p:txBody>
+      </p:sp>
+      <p:sp>
+        <p:nvSpPr>
+          <p:cNvPr id="34" name="Text 32"/>
           <p:cNvSpPr/>
           <p:nvPr/>
         </p:nvSpPr>
@@ -3148,59 +3238,24 @@
       </p:sp>
       <p:sp>
         <p:nvSpPr>
-          <p:cNvPr id="3" name="Text 1"/>
-          <p:cNvSpPr/>
-          <p:nvPr/>
-        </p:nvSpPr>
-        <p:spPr>
-          <a:xfrm>
-            <a:off x="731520" y="1965960"/>
-            <a:ext cx="2377440" cy="548640"/>
-          </a:xfrm>
-          <a:prstGeom prst="rect">
-            <a:avLst/>
-          </a:prstGeom>
-          <a:noFill/>
-          <a:ln/>
-        </p:spPr>
-        <p:txBody>
-          <a:bodyPr wrap="square" lIns="0" tIns="0" rIns="0" bIns="0" rtlCol="0" anchor="ctr"/>
-          <a:lstStyle/>
-          <a:p>
-            <a:pPr indent="0" marL="0">
-              <a:buNone/>
-            </a:pPr>
-            <a:r>
-              <a:rPr lang="en-US" sz="2300" b="1" dirty="0">
-                <a:solidFill>
-                  <a:srgbClr val="E7C24A"/>
-                </a:solidFill>
-                <a:latin typeface="Bookman Old Style" pitchFamily="34" charset="0"/>
-                <a:ea typeface="Bookman Old Style" pitchFamily="34" charset="-122"/>
-                <a:cs typeface="Bookman Old Style" pitchFamily="34" charset="-120"/>
-              </a:rPr>
-              <a:t>Problem</a:t>
-            </a:r>
-            <a:endParaRPr lang="en-US" sz="2300" dirty="0"/>
-          </a:p>
-        </p:txBody>
-      </p:sp>
-      <p:sp>
-        <p:nvSpPr>
-          <p:cNvPr id="4" name="Shape 2"/>
-          <p:cNvSpPr/>
-          <p:nvPr/>
-        </p:nvSpPr>
-        <p:spPr>
-          <a:xfrm>
-            <a:off x="3200400" y="1920240"/>
-            <a:ext cx="0" cy="1783080"/>
-          </a:xfrm>
-          <a:prstGeom prst="line">
-            <a:avLst/>
-          </a:prstGeom>
-          <a:noFill/>
-          <a:ln w="31750">
+          <p:cNvPr id="3" name="Shape 1"/>
+          <p:cNvSpPr/>
+          <p:nvPr/>
+        </p:nvSpPr>
+        <p:spPr>
+          <a:xfrm>
+            <a:off x="731520" y="1920240"/>
+            <a:ext cx="10698480" cy="1965960"/>
+          </a:xfrm>
+          <a:prstGeom prst="roundRect">
+            <a:avLst>
+              <a:gd name="adj" fmla="val 4651"/>
+            </a:avLst>
+          </a:prstGeom>
+          <a:solidFill>
+            <a:srgbClr val="F7F1E4"/>
+          </a:solidFill>
+          <a:ln w="19050">
             <a:solidFill>
               <a:srgbClr val="E7C24A"/>
             </a:solidFill>
@@ -3210,14 +3265,53 @@
       </p:sp>
       <p:sp>
         <p:nvSpPr>
+          <p:cNvPr id="4" name="Text 2"/>
+          <p:cNvSpPr/>
+          <p:nvPr/>
+        </p:nvSpPr>
+        <p:spPr>
+          <a:xfrm>
+            <a:off x="1005840" y="2103120"/>
+            <a:ext cx="3657600" cy="457200"/>
+          </a:xfrm>
+          <a:prstGeom prst="rect">
+            <a:avLst/>
+          </a:prstGeom>
+          <a:noFill/>
+          <a:ln/>
+        </p:spPr>
+        <p:txBody>
+          <a:bodyPr wrap="square" lIns="0" tIns="0" rIns="0" bIns="0" rtlCol="0" anchor="ctr"/>
+          <a:lstStyle/>
+          <a:p>
+            <a:pPr indent="0" marL="0">
+              <a:buNone/>
+            </a:pPr>
+            <a:r>
+              <a:rPr lang="en-US" sz="1900" b="1" dirty="0">
+                <a:solidFill>
+                  <a:srgbClr val="E7C24A"/>
+                </a:solidFill>
+                <a:latin typeface="Bookman Old Style" pitchFamily="34" charset="0"/>
+                <a:ea typeface="Bookman Old Style" pitchFamily="34" charset="-122"/>
+                <a:cs typeface="Bookman Old Style" pitchFamily="34" charset="-120"/>
+              </a:rPr>
+              <a:t>Problem</a:t>
+            </a:r>
+            <a:endParaRPr lang="en-US" sz="1900" dirty="0"/>
+          </a:p>
+        </p:txBody>
+      </p:sp>
+      <p:sp>
+        <p:nvSpPr>
           <p:cNvPr id="5" name="Text 3"/>
           <p:cNvSpPr/>
           <p:nvPr/>
         </p:nvSpPr>
         <p:spPr>
           <a:xfrm>
-            <a:off x="3474720" y="1920240"/>
-            <a:ext cx="7955280" cy="1920240"/>
+            <a:off x="1005840" y="2578608"/>
+            <a:ext cx="9966960" cy="1188720"/>
           </a:xfrm>
           <a:prstGeom prst="rect">
             <a:avLst/>
@@ -3231,12 +3325,12 @@
           <a:p>
             <a:pPr indent="0" marL="0">
               <a:lnSpc>
-                <a:spcPct val="112000"/>
+                <a:spcPct val="105000"/>
               </a:lnSpc>
               <a:buNone/>
             </a:pPr>
             <a:r>
-              <a:rPr lang="en-US" sz="1450" dirty="0">
+              <a:rPr lang="en-US" sz="1300" dirty="0">
                 <a:solidFill>
                   <a:srgbClr val="281F10"/>
                 </a:solidFill>
@@ -3246,65 +3340,30 @@
               </a:rPr>
               <a:t>Every few seconds the fog node must take everything buffered so far and aggregate it into window summaries, while ten sensors keep writing new readings into that same buffer. One shared buffer and one lock means aggregation blocks ingest — copying under the lock stalls every sensor at every window, and skipping the lock loses or double-counts readings. A textbook reader-writer race.</a:t>
             </a:r>
-            <a:endParaRPr lang="en-US" sz="1450" dirty="0"/>
-          </a:p>
-        </p:txBody>
-      </p:sp>
-      <p:sp>
-        <p:nvSpPr>
-          <p:cNvPr id="6" name="Text 4"/>
-          <p:cNvSpPr/>
-          <p:nvPr/>
-        </p:nvSpPr>
-        <p:spPr>
-          <a:xfrm>
-            <a:off x="731520" y="4114800"/>
-            <a:ext cx="2377440" cy="548640"/>
-          </a:xfrm>
-          <a:prstGeom prst="rect">
-            <a:avLst/>
-          </a:prstGeom>
-          <a:noFill/>
-          <a:ln/>
-        </p:spPr>
-        <p:txBody>
-          <a:bodyPr wrap="square" lIns="0" tIns="0" rIns="0" bIns="0" rtlCol="0" anchor="ctr"/>
-          <a:lstStyle/>
-          <a:p>
-            <a:pPr indent="0" marL="0">
-              <a:buNone/>
-            </a:pPr>
-            <a:r>
-              <a:rPr lang="en-US" sz="2300" b="1" dirty="0">
-                <a:solidFill>
-                  <a:srgbClr val="B9822A"/>
-                </a:solidFill>
-                <a:latin typeface="Bookman Old Style" pitchFamily="34" charset="0"/>
-                <a:ea typeface="Bookman Old Style" pitchFamily="34" charset="-122"/>
-                <a:cs typeface="Bookman Old Style" pitchFamily="34" charset="-120"/>
-              </a:rPr>
-              <a:t>Solution</a:t>
-            </a:r>
-            <a:endParaRPr lang="en-US" sz="2300" dirty="0"/>
-          </a:p>
-        </p:txBody>
-      </p:sp>
-      <p:sp>
-        <p:nvSpPr>
-          <p:cNvPr id="7" name="Shape 5"/>
-          <p:cNvSpPr/>
-          <p:nvPr/>
-        </p:nvSpPr>
-        <p:spPr>
-          <a:xfrm>
-            <a:off x="3200400" y="4069080"/>
-            <a:ext cx="0" cy="1783080"/>
-          </a:xfrm>
-          <a:prstGeom prst="line">
-            <a:avLst/>
-          </a:prstGeom>
-          <a:noFill/>
-          <a:ln w="31750">
+            <a:endParaRPr lang="en-US" sz="1300" dirty="0"/>
+          </a:p>
+        </p:txBody>
+      </p:sp>
+      <p:sp>
+        <p:nvSpPr>
+          <p:cNvPr id="6" name="Shape 4"/>
+          <p:cNvSpPr/>
+          <p:nvPr/>
+        </p:nvSpPr>
+        <p:spPr>
+          <a:xfrm>
+            <a:off x="731520" y="4041648"/>
+            <a:ext cx="10698480" cy="1965960"/>
+          </a:xfrm>
+          <a:prstGeom prst="roundRect">
+            <a:avLst>
+              <a:gd name="adj" fmla="val 4651"/>
+            </a:avLst>
+          </a:prstGeom>
+          <a:solidFill>
+            <a:srgbClr val="F7F1E4"/>
+          </a:solidFill>
+          <a:ln w="19050">
             <a:solidFill>
               <a:srgbClr val="B9822A"/>
             </a:solidFill>
@@ -3314,14 +3373,53 @@
       </p:sp>
       <p:sp>
         <p:nvSpPr>
+          <p:cNvPr id="7" name="Text 5"/>
+          <p:cNvSpPr/>
+          <p:nvPr/>
+        </p:nvSpPr>
+        <p:spPr>
+          <a:xfrm>
+            <a:off x="1005840" y="4224528"/>
+            <a:ext cx="3657600" cy="457200"/>
+          </a:xfrm>
+          <a:prstGeom prst="rect">
+            <a:avLst/>
+          </a:prstGeom>
+          <a:noFill/>
+          <a:ln/>
+        </p:spPr>
+        <p:txBody>
+          <a:bodyPr wrap="square" lIns="0" tIns="0" rIns="0" bIns="0" rtlCol="0" anchor="ctr"/>
+          <a:lstStyle/>
+          <a:p>
+            <a:pPr indent="0" marL="0">
+              <a:buNone/>
+            </a:pPr>
+            <a:r>
+              <a:rPr lang="en-US" sz="1900" b="1" dirty="0">
+                <a:solidFill>
+                  <a:srgbClr val="B9822A"/>
+                </a:solidFill>
+                <a:latin typeface="Bookman Old Style" pitchFamily="34" charset="0"/>
+                <a:ea typeface="Bookman Old Style" pitchFamily="34" charset="-122"/>
+                <a:cs typeface="Bookman Old Style" pitchFamily="34" charset="-120"/>
+              </a:rPr>
+              <a:t>Solution</a:t>
+            </a:r>
+            <a:endParaRPr lang="en-US" sz="1900" dirty="0"/>
+          </a:p>
+        </p:txBody>
+      </p:sp>
+      <p:sp>
+        <p:nvSpPr>
           <p:cNvPr id="8" name="Text 6"/>
           <p:cNvSpPr/>
           <p:nvPr/>
         </p:nvSpPr>
         <p:spPr>
           <a:xfrm>
-            <a:off x="3474720" y="4069080"/>
-            <a:ext cx="7955280" cy="1920240"/>
+            <a:off x="1005840" y="4700016"/>
+            <a:ext cx="9966960" cy="1188720"/>
           </a:xfrm>
           <a:prstGeom prst="rect">
             <a:avLst/>
@@ -3335,12 +3433,12 @@
           <a:p>
             <a:pPr indent="0" marL="0">
               <a:lnSpc>
-                <a:spcPct val="112000"/>
+                <a:spcPct val="105000"/>
               </a:lnSpc>
               <a:buNone/>
             </a:pPr>
             <a:r>
-              <a:rPr lang="en-US" sz="1450" dirty="0">
+              <a:rPr lang="en-US" sz="1300" dirty="0">
                 <a:solidFill>
                   <a:srgbClr val="281F10"/>
                 </a:solidFill>
@@ -3350,7 +3448,7 @@
               </a:rPr>
               <a:t>Double buffering: two buffers, one live and one flushing. The lock is held only for an instant pointer swap of the two, so aggregation works on the swapped-out data while new readings flow into the fresh buffer. A concurrent-writer stress test proves it — nothing lost, nothing copied.</a:t>
             </a:r>
-            <a:endParaRPr lang="en-US" sz="1450" dirty="0"/>
+            <a:endParaRPr lang="en-US" sz="1300" dirty="0"/>
           </a:p>
         </p:txBody>
       </p:sp>

--- a/ppt/MahekNaaz_X24217808_solar-farm-monitoring.pptx
+++ b/ppt/MahekNaaz_X24217808_solar-farm-monitoring.pptx
@@ -2708,59 +2708,24 @@
       </p:sp>
       <p:sp>
         <p:nvSpPr>
-          <p:cNvPr id="4" name="Text 2"/>
-          <p:cNvSpPr/>
-          <p:nvPr/>
-        </p:nvSpPr>
-        <p:spPr>
-          <a:xfrm>
-            <a:off x="640080" y="1737360"/>
-            <a:ext cx="1097280" cy="1097280"/>
-          </a:xfrm>
-          <a:prstGeom prst="rect">
-            <a:avLst/>
-          </a:prstGeom>
-          <a:noFill/>
-          <a:ln/>
-        </p:spPr>
-        <p:txBody>
-          <a:bodyPr wrap="square" lIns="0" tIns="0" rIns="0" bIns="0" rtlCol="0" anchor="ctr"/>
-          <a:lstStyle/>
-          <a:p>
-            <a:pPr indent="0" marL="0">
-              <a:buNone/>
-            </a:pPr>
-            <a:r>
-              <a:rPr lang="en-US" sz="5400" b="1" dirty="0">
-                <a:solidFill>
-                  <a:srgbClr val="F7F1E4"/>
-                </a:solidFill>
-                <a:latin typeface="Bookman Old Style" pitchFamily="34" charset="0"/>
-                <a:ea typeface="Bookman Old Style" pitchFamily="34" charset="-122"/>
-                <a:cs typeface="Bookman Old Style" pitchFamily="34" charset="-120"/>
-              </a:rPr>
-              <a:t>1</a:t>
-            </a:r>
-            <a:endParaRPr lang="en-US" sz="5400" dirty="0"/>
-          </a:p>
-        </p:txBody>
-      </p:sp>
-      <p:sp>
-        <p:nvSpPr>
-          <p:cNvPr id="5" name="Shape 3"/>
-          <p:cNvSpPr/>
-          <p:nvPr/>
-        </p:nvSpPr>
-        <p:spPr>
-          <a:xfrm>
-            <a:off x="1828800" y="1920240"/>
-            <a:ext cx="0" cy="1051560"/>
-          </a:xfrm>
-          <a:prstGeom prst="line">
-            <a:avLst/>
-          </a:prstGeom>
-          <a:noFill/>
-          <a:ln w="25400">
+          <p:cNvPr id="4" name="Shape 2"/>
+          <p:cNvSpPr/>
+          <p:nvPr/>
+        </p:nvSpPr>
+        <p:spPr>
+          <a:xfrm>
+            <a:off x="640080" y="1828800"/>
+            <a:ext cx="10881360" cy="1371600"/>
+          </a:xfrm>
+          <a:prstGeom prst="roundRect">
+            <a:avLst>
+              <a:gd name="adj" fmla="val 6667"/>
+            </a:avLst>
+          </a:prstGeom>
+          <a:solidFill>
+            <a:srgbClr val="F7F1E4"/>
+          </a:solidFill>
+          <a:ln w="15240">
             <a:solidFill>
               <a:srgbClr val="B9822A"/>
             </a:solidFill>
@@ -2770,14 +2735,34 @@
       </p:sp>
       <p:sp>
         <p:nvSpPr>
+          <p:cNvPr id="5" name="Shape 3"/>
+          <p:cNvSpPr/>
+          <p:nvPr/>
+        </p:nvSpPr>
+        <p:spPr>
+          <a:xfrm>
+            <a:off x="960120" y="2203704"/>
+            <a:ext cx="621792" cy="621792"/>
+          </a:xfrm>
+          <a:prstGeom prst="ellipse">
+            <a:avLst/>
+          </a:prstGeom>
+          <a:solidFill>
+            <a:srgbClr val="8A5A16"/>
+          </a:solidFill>
+          <a:ln/>
+        </p:spPr>
+      </p:sp>
+      <p:sp>
+        <p:nvSpPr>
           <p:cNvPr id="6" name="Text 4"/>
           <p:cNvSpPr/>
           <p:nvPr/>
         </p:nvSpPr>
         <p:spPr>
           <a:xfrm>
-            <a:off x="2057400" y="1874520"/>
-            <a:ext cx="9509760" cy="411480"/>
+            <a:off x="960120" y="2203704"/>
+            <a:ext cx="621792" cy="621792"/>
           </a:xfrm>
           <a:prstGeom prst="rect">
             <a:avLst/>
@@ -2789,11 +2774,50 @@
           <a:bodyPr wrap="square" lIns="0" tIns="0" rIns="0" bIns="0" rtlCol="0" anchor="ctr"/>
           <a:lstStyle/>
           <a:p>
+            <a:pPr algn="ctr" indent="0" marL="0">
+              <a:buNone/>
+            </a:pPr>
+            <a:r>
+              <a:rPr lang="en-US" sz="2200" b="1" dirty="0">
+                <a:solidFill>
+                  <a:srgbClr val="FFFFFF"/>
+                </a:solidFill>
+                <a:latin typeface="Bookman Old Style" pitchFamily="34" charset="0"/>
+                <a:ea typeface="Bookman Old Style" pitchFamily="34" charset="-122"/>
+                <a:cs typeface="Bookman Old Style" pitchFamily="34" charset="-120"/>
+              </a:rPr>
+              <a:t>1</a:t>
+            </a:r>
+            <a:endParaRPr lang="en-US" sz="2200" dirty="0"/>
+          </a:p>
+        </p:txBody>
+      </p:sp>
+      <p:sp>
+        <p:nvSpPr>
+          <p:cNvPr id="7" name="Text 5"/>
+          <p:cNvSpPr/>
+          <p:nvPr/>
+        </p:nvSpPr>
+        <p:spPr>
+          <a:xfrm>
+            <a:off x="1828800" y="2029968"/>
+            <a:ext cx="9418320" cy="411480"/>
+          </a:xfrm>
+          <a:prstGeom prst="rect">
+            <a:avLst/>
+          </a:prstGeom>
+          <a:noFill/>
+          <a:ln/>
+        </p:spPr>
+        <p:txBody>
+          <a:bodyPr wrap="square" lIns="0" tIns="0" rIns="0" bIns="0" rtlCol="0" anchor="ctr"/>
+          <a:lstStyle/>
+          <a:p>
             <a:pPr indent="0" marL="0">
               <a:buNone/>
             </a:pPr>
             <a:r>
-              <a:rPr lang="en-US" sz="1800" b="1" dirty="0">
+              <a:rPr lang="en-US" sz="1700" b="1" dirty="0">
                 <a:solidFill>
                   <a:srgbClr val="281F10"/>
                 </a:solidFill>
@@ -2803,20 +2827,20 @@
               </a:rPr>
               <a:t>A per-array efficiency heatmap</a:t>
             </a:r>
-            <a:endParaRPr lang="en-US" sz="1800" dirty="0"/>
-          </a:p>
-        </p:txBody>
-      </p:sp>
-      <p:sp>
-        <p:nvSpPr>
-          <p:cNvPr id="7" name="Text 5"/>
-          <p:cNvSpPr/>
-          <p:nvPr/>
-        </p:nvSpPr>
-        <p:spPr>
-          <a:xfrm>
-            <a:off x="2057400" y="2313432"/>
-            <a:ext cx="9509760" cy="822960"/>
+            <a:endParaRPr lang="en-US" sz="1700" dirty="0"/>
+          </a:p>
+        </p:txBody>
+      </p:sp>
+      <p:sp>
+        <p:nvSpPr>
+          <p:cNvPr id="8" name="Text 6"/>
+          <p:cNvSpPr/>
+          <p:nvPr/>
+        </p:nvSpPr>
+        <p:spPr>
+          <a:xfrm>
+            <a:off x="1828800" y="2450592"/>
+            <a:ext cx="9418320" cy="594360"/>
           </a:xfrm>
           <a:prstGeom prst="rect">
             <a:avLst/>
@@ -2829,10 +2853,13 @@
           <a:lstStyle/>
           <a:p>
             <a:pPr indent="0" marL="0">
-              <a:buNone/>
-            </a:pPr>
-            <a:r>
-              <a:rPr lang="en-US" sz="1350" dirty="0">
+              <a:lnSpc>
+                <a:spcPct val="105000"/>
+              </a:lnSpc>
+              <a:buNone/>
+            </a:pPr>
+            <a:r>
+              <a:rPr lang="en-US" sz="1300" dirty="0">
                 <a:solidFill>
                   <a:srgbClr val="6E6146"/>
                 </a:solidFill>
@@ -2842,46 +2869,7 @@
               </a:rPr>
               <a:t>The serving layer fuses inverter output and panel temperature into a graded 0-100 efficiency index, rendered as a per-window heatmap.</a:t>
             </a:r>
-            <a:endParaRPr lang="en-US" sz="1350" dirty="0"/>
-          </a:p>
-        </p:txBody>
-      </p:sp>
-      <p:sp>
-        <p:nvSpPr>
-          <p:cNvPr id="8" name="Text 6"/>
-          <p:cNvSpPr/>
-          <p:nvPr/>
-        </p:nvSpPr>
-        <p:spPr>
-          <a:xfrm>
-            <a:off x="640080" y="3200400"/>
-            <a:ext cx="1097280" cy="1097280"/>
-          </a:xfrm>
-          <a:prstGeom prst="rect">
-            <a:avLst/>
-          </a:prstGeom>
-          <a:noFill/>
-          <a:ln/>
-        </p:spPr>
-        <p:txBody>
-          <a:bodyPr wrap="square" lIns="0" tIns="0" rIns="0" bIns="0" rtlCol="0" anchor="ctr"/>
-          <a:lstStyle/>
-          <a:p>
-            <a:pPr indent="0" marL="0">
-              <a:buNone/>
-            </a:pPr>
-            <a:r>
-              <a:rPr lang="en-US" sz="5400" b="1" dirty="0">
-                <a:solidFill>
-                  <a:srgbClr val="F7F1E4"/>
-                </a:solidFill>
-                <a:latin typeface="Bookman Old Style" pitchFamily="34" charset="0"/>
-                <a:ea typeface="Bookman Old Style" pitchFamily="34" charset="-122"/>
-                <a:cs typeface="Bookman Old Style" pitchFamily="34" charset="-120"/>
-              </a:rPr>
-              <a:t>2</a:t>
-            </a:r>
-            <a:endParaRPr lang="en-US" sz="5400" dirty="0"/>
+            <a:endParaRPr lang="en-US" sz="1300" dirty="0"/>
           </a:p>
         </p:txBody>
       </p:sp>
@@ -2893,14 +2881,18 @@
         </p:nvSpPr>
         <p:spPr>
           <a:xfrm>
-            <a:off x="1828800" y="3383280"/>
-            <a:ext cx="0" cy="1051560"/>
-          </a:xfrm>
-          <a:prstGeom prst="line">
-            <a:avLst/>
-          </a:prstGeom>
-          <a:noFill/>
-          <a:ln w="25400">
+            <a:off x="640080" y="3401568"/>
+            <a:ext cx="5303520" cy="2606040"/>
+          </a:xfrm>
+          <a:prstGeom prst="roundRect">
+            <a:avLst>
+              <a:gd name="adj" fmla="val 3509"/>
+            </a:avLst>
+          </a:prstGeom>
+          <a:solidFill>
+            <a:srgbClr val="F7F1E4"/>
+          </a:solidFill>
+          <a:ln w="15240">
             <a:solidFill>
               <a:srgbClr val="B9822A"/>
             </a:solidFill>
@@ -2910,14 +2902,34 @@
       </p:sp>
       <p:sp>
         <p:nvSpPr>
-          <p:cNvPr id="10" name="Text 8"/>
-          <p:cNvSpPr/>
-          <p:nvPr/>
-        </p:nvSpPr>
-        <p:spPr>
-          <a:xfrm>
-            <a:off x="2057400" y="3337560"/>
-            <a:ext cx="9509760" cy="411480"/>
+          <p:cNvPr id="10" name="Shape 8"/>
+          <p:cNvSpPr/>
+          <p:nvPr/>
+        </p:nvSpPr>
+        <p:spPr>
+          <a:xfrm>
+            <a:off x="914400" y="3675888"/>
+            <a:ext cx="603504" cy="603504"/>
+          </a:xfrm>
+          <a:prstGeom prst="ellipse">
+            <a:avLst/>
+          </a:prstGeom>
+          <a:solidFill>
+            <a:srgbClr val="8A5A16"/>
+          </a:solidFill>
+          <a:ln/>
+        </p:spPr>
+      </p:sp>
+      <p:sp>
+        <p:nvSpPr>
+          <p:cNvPr id="11" name="Text 9"/>
+          <p:cNvSpPr/>
+          <p:nvPr/>
+        </p:nvSpPr>
+        <p:spPr>
+          <a:xfrm>
+            <a:off x="914400" y="3675888"/>
+            <a:ext cx="603504" cy="603504"/>
           </a:xfrm>
           <a:prstGeom prst="rect">
             <a:avLst/>
@@ -2929,11 +2941,50 @@
           <a:bodyPr wrap="square" lIns="0" tIns="0" rIns="0" bIns="0" rtlCol="0" anchor="ctr"/>
           <a:lstStyle/>
           <a:p>
+            <a:pPr algn="ctr" indent="0" marL="0">
+              <a:buNone/>
+            </a:pPr>
+            <a:r>
+              <a:rPr lang="en-US" sz="2200" b="1" dirty="0">
+                <a:solidFill>
+                  <a:srgbClr val="FFFFFF"/>
+                </a:solidFill>
+                <a:latin typeface="Bookman Old Style" pitchFamily="34" charset="0"/>
+                <a:ea typeface="Bookman Old Style" pitchFamily="34" charset="-122"/>
+                <a:cs typeface="Bookman Old Style" pitchFamily="34" charset="-120"/>
+              </a:rPr>
+              <a:t>2</a:t>
+            </a:r>
+            <a:endParaRPr lang="en-US" sz="2200" dirty="0"/>
+          </a:p>
+        </p:txBody>
+      </p:sp>
+      <p:sp>
+        <p:nvSpPr>
+          <p:cNvPr id="12" name="Text 10"/>
+          <p:cNvSpPr/>
+          <p:nvPr/>
+        </p:nvSpPr>
+        <p:spPr>
+          <a:xfrm>
+            <a:off x="914400" y="4425696"/>
+            <a:ext cx="4754880" cy="777240"/>
+          </a:xfrm>
+          <a:prstGeom prst="rect">
+            <a:avLst/>
+          </a:prstGeom>
+          <a:noFill/>
+          <a:ln/>
+        </p:spPr>
+        <p:txBody>
+          <a:bodyPr wrap="square" lIns="0" tIns="0" rIns="0" bIns="0" rtlCol="0" anchor="ctr"/>
+          <a:lstStyle/>
+          <a:p>
             <a:pPr indent="0" marL="0">
               <a:buNone/>
             </a:pPr>
             <a:r>
-              <a:rPr lang="en-US" sz="1800" b="1" dirty="0">
+              <a:rPr lang="en-US" sz="1600" b="1" dirty="0">
                 <a:solidFill>
                   <a:srgbClr val="281F10"/>
                 </a:solidFill>
@@ -2943,20 +2994,20 @@
               </a:rPr>
               <a:t>Two live alerts on array-2</a:t>
             </a:r>
-            <a:endParaRPr lang="en-US" sz="1800" dirty="0"/>
-          </a:p>
-        </p:txBody>
-      </p:sp>
-      <p:sp>
-        <p:nvSpPr>
-          <p:cNvPr id="11" name="Text 9"/>
-          <p:cNvSpPr/>
-          <p:nvPr/>
-        </p:nvSpPr>
-        <p:spPr>
-          <a:xfrm>
-            <a:off x="2057400" y="3776472"/>
-            <a:ext cx="9509760" cy="822960"/>
+            <a:endParaRPr lang="en-US" sz="1600" dirty="0"/>
+          </a:p>
+        </p:txBody>
+      </p:sp>
+      <p:sp>
+        <p:nvSpPr>
+          <p:cNvPr id="13" name="Text 11"/>
+          <p:cNvSpPr/>
+          <p:nvPr/>
+        </p:nvSpPr>
+        <p:spPr>
+          <a:xfrm>
+            <a:off x="914400" y="5184648"/>
+            <a:ext cx="4754880" cy="640080"/>
           </a:xfrm>
           <a:prstGeom prst="rect">
             <a:avLst/>
@@ -2969,10 +3020,13 @@
           <a:lstStyle/>
           <a:p>
             <a:pPr indent="0" marL="0">
-              <a:buNone/>
-            </a:pPr>
-            <a:r>
-              <a:rPr lang="en-US" sz="1350" dirty="0">
+              <a:lnSpc>
+                <a:spcPct val="106000"/>
+              </a:lnSpc>
+              <a:buNone/>
+            </a:pPr>
+            <a:r>
+              <a:rPr lang="en-US" sz="1250" dirty="0">
                 <a:solidFill>
                   <a:srgbClr val="6E6146"/>
                 </a:solidFill>
@@ -2982,65 +3036,30 @@
               </a:rPr>
               <a:t>Inverter underperformance and an undervoltage fault are both firing on array-2 right now, alongside the inverter-output trend.</a:t>
             </a:r>
-            <a:endParaRPr lang="en-US" sz="1350" dirty="0"/>
-          </a:p>
-        </p:txBody>
-      </p:sp>
-      <p:sp>
-        <p:nvSpPr>
-          <p:cNvPr id="12" name="Text 10"/>
-          <p:cNvSpPr/>
-          <p:nvPr/>
-        </p:nvSpPr>
-        <p:spPr>
-          <a:xfrm>
-            <a:off x="640080" y="4663440"/>
-            <a:ext cx="1097280" cy="1097280"/>
-          </a:xfrm>
-          <a:prstGeom prst="rect">
-            <a:avLst/>
-          </a:prstGeom>
-          <a:noFill/>
-          <a:ln/>
-        </p:spPr>
-        <p:txBody>
-          <a:bodyPr wrap="square" lIns="0" tIns="0" rIns="0" bIns="0" rtlCol="0" anchor="ctr"/>
-          <a:lstStyle/>
-          <a:p>
-            <a:pPr indent="0" marL="0">
-              <a:buNone/>
-            </a:pPr>
-            <a:r>
-              <a:rPr lang="en-US" sz="5400" b="1" dirty="0">
-                <a:solidFill>
-                  <a:srgbClr val="F7F1E4"/>
-                </a:solidFill>
-                <a:latin typeface="Bookman Old Style" pitchFamily="34" charset="0"/>
-                <a:ea typeface="Bookman Old Style" pitchFamily="34" charset="-122"/>
-                <a:cs typeface="Bookman Old Style" pitchFamily="34" charset="-120"/>
-              </a:rPr>
-              <a:t>3</a:t>
-            </a:r>
-            <a:endParaRPr lang="en-US" sz="5400" dirty="0"/>
-          </a:p>
-        </p:txBody>
-      </p:sp>
-      <p:sp>
-        <p:nvSpPr>
-          <p:cNvPr id="13" name="Shape 11"/>
-          <p:cNvSpPr/>
-          <p:nvPr/>
-        </p:nvSpPr>
-        <p:spPr>
-          <a:xfrm>
-            <a:off x="1828800" y="4846320"/>
-            <a:ext cx="0" cy="1051560"/>
-          </a:xfrm>
-          <a:prstGeom prst="line">
-            <a:avLst/>
-          </a:prstGeom>
-          <a:noFill/>
-          <a:ln w="25400">
+            <a:endParaRPr lang="en-US" sz="1250" dirty="0"/>
+          </a:p>
+        </p:txBody>
+      </p:sp>
+      <p:sp>
+        <p:nvSpPr>
+          <p:cNvPr id="14" name="Shape 12"/>
+          <p:cNvSpPr/>
+          <p:nvPr/>
+        </p:nvSpPr>
+        <p:spPr>
+          <a:xfrm>
+            <a:off x="6217920" y="3401568"/>
+            <a:ext cx="5303520" cy="2606040"/>
+          </a:xfrm>
+          <a:prstGeom prst="roundRect">
+            <a:avLst>
+              <a:gd name="adj" fmla="val 3509"/>
+            </a:avLst>
+          </a:prstGeom>
+          <a:solidFill>
+            <a:srgbClr val="F7F1E4"/>
+          </a:solidFill>
+          <a:ln w="15240">
             <a:solidFill>
               <a:srgbClr val="B9822A"/>
             </a:solidFill>
@@ -3050,14 +3069,34 @@
       </p:sp>
       <p:sp>
         <p:nvSpPr>
-          <p:cNvPr id="14" name="Text 12"/>
-          <p:cNvSpPr/>
-          <p:nvPr/>
-        </p:nvSpPr>
-        <p:spPr>
-          <a:xfrm>
-            <a:off x="2057400" y="4800600"/>
-            <a:ext cx="9509760" cy="411480"/>
+          <p:cNvPr id="15" name="Shape 13"/>
+          <p:cNvSpPr/>
+          <p:nvPr/>
+        </p:nvSpPr>
+        <p:spPr>
+          <a:xfrm>
+            <a:off x="6492240" y="3675888"/>
+            <a:ext cx="603504" cy="603504"/>
+          </a:xfrm>
+          <a:prstGeom prst="ellipse">
+            <a:avLst/>
+          </a:prstGeom>
+          <a:solidFill>
+            <a:srgbClr val="8A5A16"/>
+          </a:solidFill>
+          <a:ln/>
+        </p:spPr>
+      </p:sp>
+      <p:sp>
+        <p:nvSpPr>
+          <p:cNvPr id="16" name="Text 14"/>
+          <p:cNvSpPr/>
+          <p:nvPr/>
+        </p:nvSpPr>
+        <p:spPr>
+          <a:xfrm>
+            <a:off x="6492240" y="3675888"/>
+            <a:ext cx="603504" cy="603504"/>
           </a:xfrm>
           <a:prstGeom prst="rect">
             <a:avLst/>
@@ -3069,11 +3108,50 @@
           <a:bodyPr wrap="square" lIns="0" tIns="0" rIns="0" bIns="0" rtlCol="0" anchor="ctr"/>
           <a:lstStyle/>
           <a:p>
+            <a:pPr algn="ctr" indent="0" marL="0">
+              <a:buNone/>
+            </a:pPr>
+            <a:r>
+              <a:rPr lang="en-US" sz="2200" b="1" dirty="0">
+                <a:solidFill>
+                  <a:srgbClr val="FFFFFF"/>
+                </a:solidFill>
+                <a:latin typeface="Bookman Old Style" pitchFamily="34" charset="0"/>
+                <a:ea typeface="Bookman Old Style" pitchFamily="34" charset="-122"/>
+                <a:cs typeface="Bookman Old Style" pitchFamily="34" charset="-120"/>
+              </a:rPr>
+              <a:t>3</a:t>
+            </a:r>
+            <a:endParaRPr lang="en-US" sz="2200" dirty="0"/>
+          </a:p>
+        </p:txBody>
+      </p:sp>
+      <p:sp>
+        <p:nvSpPr>
+          <p:cNvPr id="17" name="Text 15"/>
+          <p:cNvSpPr/>
+          <p:nvPr/>
+        </p:nvSpPr>
+        <p:spPr>
+          <a:xfrm>
+            <a:off x="6492240" y="4425696"/>
+            <a:ext cx="4754880" cy="777240"/>
+          </a:xfrm>
+          <a:prstGeom prst="rect">
+            <a:avLst/>
+          </a:prstGeom>
+          <a:noFill/>
+          <a:ln/>
+        </p:spPr>
+        <p:txBody>
+          <a:bodyPr wrap="square" lIns="0" tIns="0" rIns="0" bIns="0" rtlCol="0" anchor="ctr"/>
+          <a:lstStyle/>
+          <a:p>
             <a:pPr indent="0" marL="0">
               <a:buNone/>
             </a:pPr>
             <a:r>
-              <a:rPr lang="en-US" sz="1800" b="1" dirty="0">
+              <a:rPr lang="en-US" sz="1600" b="1" dirty="0">
                 <a:solidFill>
                   <a:srgbClr val="281F10"/>
                 </a:solidFill>
@@ -3083,20 +3161,20 @@
               </a:rPr>
               <a:t>Live per-array readings</a:t>
             </a:r>
-            <a:endParaRPr lang="en-US" sz="1800" dirty="0"/>
-          </a:p>
-        </p:txBody>
-      </p:sp>
-      <p:sp>
-        <p:nvSpPr>
-          <p:cNvPr id="15" name="Text 13"/>
-          <p:cNvSpPr/>
-          <p:nvPr/>
-        </p:nvSpPr>
-        <p:spPr>
-          <a:xfrm>
-            <a:off x="2057400" y="5239512"/>
-            <a:ext cx="9509760" cy="822960"/>
+            <a:endParaRPr lang="en-US" sz="1600" dirty="0"/>
+          </a:p>
+        </p:txBody>
+      </p:sp>
+      <p:sp>
+        <p:nvSpPr>
+          <p:cNvPr id="18" name="Text 16"/>
+          <p:cNvSpPr/>
+          <p:nvPr/>
+        </p:nvSpPr>
+        <p:spPr>
+          <a:xfrm>
+            <a:off x="6492240" y="5184648"/>
+            <a:ext cx="4754880" cy="640080"/>
           </a:xfrm>
           <a:prstGeom prst="rect">
             <a:avLst/>
@@ -3109,10 +3187,13 @@
           <a:lstStyle/>
           <a:p>
             <a:pPr indent="0" marL="0">
-              <a:buNone/>
-            </a:pPr>
-            <a:r>
-              <a:rPr lang="en-US" sz="1350" dirty="0">
+              <a:lnSpc>
+                <a:spcPct val="106000"/>
+              </a:lnSpc>
+              <a:buNone/>
+            </a:pPr>
+            <a:r>
+              <a:rPr lang="en-US" sz="1250" dirty="0">
                 <a:solidFill>
                   <a:srgbClr val="6E6146"/>
                 </a:solidFill>
@@ -3122,46 +3203,7 @@
               </a:rPr>
               <a:t>Irradiance, panel temperature, inverter output, DC voltage and soiling for both arrays, so a hot, derating panel is visible early.</a:t>
             </a:r>
-            <a:endParaRPr lang="en-US" sz="1350" dirty="0"/>
-          </a:p>
-        </p:txBody>
-      </p:sp>
-      <p:sp>
-        <p:nvSpPr>
-          <p:cNvPr id="16" name="Text 14"/>
-          <p:cNvSpPr/>
-          <p:nvPr/>
-        </p:nvSpPr>
-        <p:spPr>
-          <a:xfrm>
-            <a:off x="640080" y="6309360"/>
-            <a:ext cx="10972800" cy="365760"/>
-          </a:xfrm>
-          <a:prstGeom prst="rect">
-            <a:avLst/>
-          </a:prstGeom>
-          <a:noFill/>
-          <a:ln/>
-        </p:spPr>
-        <p:txBody>
-          <a:bodyPr wrap="square" rtlCol="0" anchor="ctr"/>
-          <a:lstStyle/>
-          <a:p>
-            <a:pPr indent="0" marL="0">
-              <a:buNone/>
-            </a:pPr>
-            <a:r>
-              <a:rPr lang="en-US" sz="1300" i="1" dirty="0">
-                <a:solidFill>
-                  <a:srgbClr val="D8A94E"/>
-                </a:solidFill>
-                <a:latin typeface="Calibri" pitchFamily="34" charset="0"/>
-                <a:ea typeface="Calibri" pitchFamily="34" charset="-122"/>
-                <a:cs typeface="Calibri" pitchFamily="34" charset="-120"/>
-              </a:rPr>
-              <a:t>Switch to the live dashboard here — backup video ready.</a:t>
-            </a:r>
-            <a:endParaRPr lang="en-US" sz="1300" dirty="0"/>
+            <a:endParaRPr lang="en-US" sz="1250" dirty="0"/>
           </a:p>
         </p:txBody>
       </p:sp>
@@ -3244,12 +3286,12 @@
         </p:nvSpPr>
         <p:spPr>
           <a:xfrm>
-            <a:off x="731520" y="1920240"/>
-            <a:ext cx="10698480" cy="1965960"/>
+            <a:off x="640080" y="1874520"/>
+            <a:ext cx="4937760" cy="4160520"/>
           </a:xfrm>
           <a:prstGeom prst="roundRect">
             <a:avLst>
-              <a:gd name="adj" fmla="val 4651"/>
+              <a:gd name="adj" fmla="val 2198"/>
             </a:avLst>
           </a:prstGeom>
           <a:solidFill>
@@ -3271,7 +3313,7 @@
         </p:nvSpPr>
         <p:spPr>
           <a:xfrm>
-            <a:off x="1005840" y="2103120"/>
+            <a:off x="960120" y="2103120"/>
             <a:ext cx="3657600" cy="457200"/>
           </a:xfrm>
           <a:prstGeom prst="rect">
@@ -3310,8 +3352,8 @@
         </p:nvSpPr>
         <p:spPr>
           <a:xfrm>
-            <a:off x="1005840" y="2578608"/>
-            <a:ext cx="9966960" cy="1188720"/>
+            <a:off x="960120" y="2651760"/>
+            <a:ext cx="4343400" cy="3200400"/>
           </a:xfrm>
           <a:prstGeom prst="rect">
             <a:avLst/>
@@ -3325,12 +3367,12 @@
           <a:p>
             <a:pPr indent="0" marL="0">
               <a:lnSpc>
-                <a:spcPct val="105000"/>
+                <a:spcPct val="112000"/>
               </a:lnSpc>
               <a:buNone/>
             </a:pPr>
             <a:r>
-              <a:rPr lang="en-US" sz="1300" dirty="0">
+              <a:rPr lang="en-US" sz="1350" dirty="0">
                 <a:solidFill>
                   <a:srgbClr val="281F10"/>
                 </a:solidFill>
@@ -3340,7 +3382,7 @@
               </a:rPr>
               <a:t>Every few seconds the fog node must take everything buffered so far and aggregate it into window summaries, while ten sensors keep writing new readings into that same buffer. One shared buffer and one lock means aggregation blocks ingest — copying under the lock stalls every sensor at every window, and skipping the lock loses or double-counts readings. A textbook reader-writer race.</a:t>
             </a:r>
-            <a:endParaRPr lang="en-US" sz="1300" dirty="0"/>
+            <a:endParaRPr lang="en-US" sz="1350" dirty="0"/>
           </a:p>
         </p:txBody>
       </p:sp>
@@ -3352,12 +3394,12 @@
         </p:nvSpPr>
         <p:spPr>
           <a:xfrm>
-            <a:off x="731520" y="4041648"/>
-            <a:ext cx="10698480" cy="1965960"/>
+            <a:off x="6611112" y="1874520"/>
+            <a:ext cx="4937760" cy="4160520"/>
           </a:xfrm>
           <a:prstGeom prst="roundRect">
             <a:avLst>
-              <a:gd name="adj" fmla="val 4651"/>
+              <a:gd name="adj" fmla="val 2198"/>
             </a:avLst>
           </a:prstGeom>
           <a:solidFill>
@@ -3379,7 +3421,7 @@
         </p:nvSpPr>
         <p:spPr>
           <a:xfrm>
-            <a:off x="1005840" y="4224528"/>
+            <a:off x="6931152" y="2103120"/>
             <a:ext cx="3657600" cy="457200"/>
           </a:xfrm>
           <a:prstGeom prst="rect">
@@ -3418,8 +3460,8 @@
         </p:nvSpPr>
         <p:spPr>
           <a:xfrm>
-            <a:off x="1005840" y="4700016"/>
-            <a:ext cx="9966960" cy="1188720"/>
+            <a:off x="6931152" y="2651760"/>
+            <a:ext cx="4343400" cy="3200400"/>
           </a:xfrm>
           <a:prstGeom prst="rect">
             <a:avLst/>
@@ -3433,12 +3475,12 @@
           <a:p>
             <a:pPr indent="0" marL="0">
               <a:lnSpc>
-                <a:spcPct val="105000"/>
+                <a:spcPct val="112000"/>
               </a:lnSpc>
               <a:buNone/>
             </a:pPr>
             <a:r>
-              <a:rPr lang="en-US" sz="1300" dirty="0">
+              <a:rPr lang="en-US" sz="1350" dirty="0">
                 <a:solidFill>
                   <a:srgbClr val="281F10"/>
                 </a:solidFill>
@@ -3448,9 +3490,29 @@
               </a:rPr>
               <a:t>Double buffering: two buffers, one live and one flushing. The lock is held only for an instant pointer swap of the two, so aggregation works on the swapped-out data while new readings flow into the fresh buffer. A concurrent-writer stress test proves it — nothing lost, nothing copied.</a:t>
             </a:r>
-            <a:endParaRPr lang="en-US" sz="1300" dirty="0"/>
-          </a:p>
-        </p:txBody>
+            <a:endParaRPr lang="en-US" sz="1350" dirty="0"/>
+          </a:p>
+        </p:txBody>
+      </p:sp>
+      <p:sp>
+        <p:nvSpPr>
+          <p:cNvPr id="9" name="Shape 7"/>
+          <p:cNvSpPr/>
+          <p:nvPr/>
+        </p:nvSpPr>
+        <p:spPr>
+          <a:xfrm>
+            <a:off x="5669280" y="3703320"/>
+            <a:ext cx="841248" cy="512064"/>
+          </a:xfrm>
+          <a:prstGeom prst="rightArrow">
+            <a:avLst/>
+          </a:prstGeom>
+          <a:solidFill>
+            <a:srgbClr val="8A5A16"/>
+          </a:solidFill>
+          <a:ln/>
+        </p:spPr>
       </p:sp>
     </p:spTree>
   </p:cSld>

--- a/ppt/MahekNaaz_X24217808_solar-farm-monitoring.pptx
+++ b/ppt/MahekNaaz_X24217808_solar-farm-monitoring.pptx
@@ -1124,7 +1124,7 @@
     <p:bg>
       <p:bgPr>
         <a:solidFill>
-          <a:srgbClr val="2A2012"/>
+          <a:srgbClr val="FFFFFF"/>
         </a:solidFill>
       </p:bgPr>
     </p:bg>
@@ -1169,7 +1169,7 @@
             <a:r>
               <a:rPr lang="en-US" sz="1400" b="1" spc="300" kern="0" dirty="0">
                 <a:solidFill>
-                  <a:srgbClr val="E7C24A"/>
+                  <a:srgbClr val="D8A94E"/>
                 </a:solidFill>
                 <a:latin typeface="Calibri" pitchFamily="34" charset="0"/>
                 <a:ea typeface="Calibri" pitchFamily="34" charset="-122"/>
@@ -1208,7 +1208,7 @@
             <a:r>
               <a:rPr lang="en-US" sz="3800" b="1" dirty="0">
                 <a:solidFill>
-                  <a:srgbClr val="FFFFFF"/>
+                  <a:srgbClr val="281F10"/>
                 </a:solidFill>
                 <a:latin typeface="Bookman Old Style" pitchFamily="34" charset="0"/>
                 <a:ea typeface="Bookman Old Style" pitchFamily="34" charset="-122"/>
@@ -1247,7 +1247,7 @@
             <a:r>
               <a:rPr lang="en-US" sz="1600" dirty="0">
                 <a:solidFill>
-                  <a:srgbClr val="D8A94E"/>
+                  <a:srgbClr val="B9822A"/>
                 </a:solidFill>
                 <a:latin typeface="Calibri" pitchFamily="34" charset="0"/>
                 <a:ea typeface="Calibri" pitchFamily="34" charset="-122"/>
@@ -1289,7 +1289,7 @@
             <a:r>
               <a:rPr lang="en-US" sz="1800" dirty="0">
                 <a:solidFill>
-                  <a:srgbClr val="EAD9B8"/>
+                  <a:srgbClr val="281F10"/>
                 </a:solidFill>
                 <a:latin typeface="Calibri" pitchFamily="34" charset="0"/>
                 <a:ea typeface="Calibri" pitchFamily="34" charset="-122"/>
@@ -1309,23 +1309,16 @@
         </p:nvSpPr>
         <p:spPr>
           <a:xfrm>
-            <a:off x="658368" y="5623560"/>
-            <a:ext cx="2651760" cy="566928"/>
-          </a:xfrm>
-          <a:prstGeom prst="roundRect">
-            <a:avLst>
-              <a:gd name="adj" fmla="val 50000"/>
-            </a:avLst>
-          </a:prstGeom>
-          <a:solidFill>
-            <a:srgbClr val="342815"/>
-          </a:solidFill>
-          <a:ln w="12700">
-            <a:solidFill>
-              <a:srgbClr val="E7C24A"/>
-            </a:solidFill>
-            <a:prstDash val="solid"/>
-          </a:ln>
+            <a:off x="658368" y="5769864"/>
+            <a:ext cx="146304" cy="146304"/>
+          </a:xfrm>
+          <a:prstGeom prst="rect">
+            <a:avLst/>
+          </a:prstGeom>
+          <a:solidFill>
+            <a:srgbClr val="D8A94E"/>
+          </a:solidFill>
+          <a:ln/>
         </p:spPr>
       </p:sp>
       <p:sp>
@@ -1336,8 +1329,8 @@
         </p:nvSpPr>
         <p:spPr>
           <a:xfrm>
-            <a:off x="658368" y="5623560"/>
-            <a:ext cx="2651760" cy="566928"/>
+            <a:off x="932688" y="5623560"/>
+            <a:ext cx="2560320" cy="457200"/>
           </a:xfrm>
           <a:prstGeom prst="rect">
             <a:avLst/>
@@ -1349,13 +1342,13 @@
           <a:bodyPr wrap="square" lIns="0" tIns="0" rIns="0" bIns="0" rtlCol="0" anchor="ctr"/>
           <a:lstStyle/>
           <a:p>
-            <a:pPr algn="ctr" indent="0" marL="0">
-              <a:buNone/>
-            </a:pPr>
-            <a:r>
-              <a:rPr lang="en-US" sz="1350" b="1" dirty="0">
-                <a:solidFill>
-                  <a:srgbClr val="E7C24A"/>
+            <a:pPr indent="0" marL="0">
+              <a:buNone/>
+            </a:pPr>
+            <a:r>
+              <a:rPr lang="en-US" sz="1400" b="1" dirty="0">
+                <a:solidFill>
+                  <a:srgbClr val="281F10"/>
                 </a:solidFill>
                 <a:latin typeface="Calibri" pitchFamily="34" charset="0"/>
                 <a:ea typeface="Calibri" pitchFamily="34" charset="-122"/>
@@ -1363,7 +1356,7 @@
               </a:rPr>
               <a:t>Health 100→0 · 45–72 °C</a:t>
             </a:r>
-            <a:endParaRPr lang="en-US" sz="1350" dirty="0"/>
+            <a:endParaRPr lang="en-US" sz="1400" dirty="0"/>
           </a:p>
         </p:txBody>
       </p:sp>
@@ -1375,23 +1368,16 @@
         </p:nvSpPr>
         <p:spPr>
           <a:xfrm>
-            <a:off x="3538728" y="5623560"/>
-            <a:ext cx="2651760" cy="566928"/>
-          </a:xfrm>
-          <a:prstGeom prst="roundRect">
-            <a:avLst>
-              <a:gd name="adj" fmla="val 50000"/>
-            </a:avLst>
-          </a:prstGeom>
-          <a:solidFill>
-            <a:srgbClr val="342815"/>
-          </a:solidFill>
-          <a:ln w="12700">
-            <a:solidFill>
-              <a:srgbClr val="E7C24A"/>
-            </a:solidFill>
-            <a:prstDash val="solid"/>
-          </a:ln>
+            <a:off x="3538728" y="5769864"/>
+            <a:ext cx="146304" cy="146304"/>
+          </a:xfrm>
+          <a:prstGeom prst="rect">
+            <a:avLst/>
+          </a:prstGeom>
+          <a:solidFill>
+            <a:srgbClr val="D8A94E"/>
+          </a:solidFill>
+          <a:ln/>
         </p:spPr>
       </p:sp>
       <p:sp>
@@ -1402,8 +1388,8 @@
         </p:nvSpPr>
         <p:spPr>
           <a:xfrm>
-            <a:off x="3538728" y="5623560"/>
-            <a:ext cx="2651760" cy="566928"/>
+            <a:off x="3813048" y="5623560"/>
+            <a:ext cx="2560320" cy="457200"/>
           </a:xfrm>
           <a:prstGeom prst="rect">
             <a:avLst/>
@@ -1415,13 +1401,13 @@
           <a:bodyPr wrap="square" lIns="0" tIns="0" rIns="0" bIns="0" rtlCol="0" anchor="ctr"/>
           <a:lstStyle/>
           <a:p>
-            <a:pPr algn="ctr" indent="0" marL="0">
-              <a:buNone/>
-            </a:pPr>
-            <a:r>
-              <a:rPr lang="en-US" sz="1350" b="1" dirty="0">
-                <a:solidFill>
-                  <a:srgbClr val="E7C24A"/>
+            <a:pPr indent="0" marL="0">
+              <a:buNone/>
+            </a:pPr>
+            <a:r>
+              <a:rPr lang="en-US" sz="1400" b="1" dirty="0">
+                <a:solidFill>
+                  <a:srgbClr val="281F10"/>
                 </a:solidFill>
                 <a:latin typeface="Calibri" pitchFamily="34" charset="0"/>
                 <a:ea typeface="Calibri" pitchFamily="34" charset="-122"/>
@@ -1429,7 +1415,7 @@
               </a:rPr>
               <a:t>Cleaning &gt; 25% soiling</a:t>
             </a:r>
-            <a:endParaRPr lang="en-US" sz="1350" dirty="0"/>
+            <a:endParaRPr lang="en-US" sz="1400" dirty="0"/>
           </a:p>
         </p:txBody>
       </p:sp>
@@ -1441,23 +1427,16 @@
         </p:nvSpPr>
         <p:spPr>
           <a:xfrm>
-            <a:off x="6419088" y="5623560"/>
-            <a:ext cx="2651760" cy="566928"/>
-          </a:xfrm>
-          <a:prstGeom prst="roundRect">
-            <a:avLst>
-              <a:gd name="adj" fmla="val 50000"/>
-            </a:avLst>
-          </a:prstGeom>
-          <a:solidFill>
-            <a:srgbClr val="342815"/>
-          </a:solidFill>
-          <a:ln w="12700">
-            <a:solidFill>
-              <a:srgbClr val="E7C24A"/>
-            </a:solidFill>
-            <a:prstDash val="solid"/>
-          </a:ln>
+            <a:off x="6419088" y="5769864"/>
+            <a:ext cx="146304" cy="146304"/>
+          </a:xfrm>
+          <a:prstGeom prst="rect">
+            <a:avLst/>
+          </a:prstGeom>
+          <a:solidFill>
+            <a:srgbClr val="D8A94E"/>
+          </a:solidFill>
+          <a:ln/>
         </p:spPr>
       </p:sp>
       <p:sp>
@@ -1468,8 +1447,8 @@
         </p:nvSpPr>
         <p:spPr>
           <a:xfrm>
-            <a:off x="6419088" y="5623560"/>
-            <a:ext cx="2651760" cy="566928"/>
+            <a:off x="6693408" y="5623560"/>
+            <a:ext cx="2560320" cy="457200"/>
           </a:xfrm>
           <a:prstGeom prst="rect">
             <a:avLst/>
@@ -1481,13 +1460,13 @@
           <a:bodyPr wrap="square" lIns="0" tIns="0" rIns="0" bIns="0" rtlCol="0" anchor="ctr"/>
           <a:lstStyle/>
           <a:p>
-            <a:pPr algn="ctr" indent="0" marL="0">
-              <a:buNone/>
-            </a:pPr>
-            <a:r>
-              <a:rPr lang="en-US" sz="1350" b="1" dirty="0">
-                <a:solidFill>
-                  <a:srgbClr val="E7C24A"/>
+            <a:pPr indent="0" marL="0">
+              <a:buNone/>
+            </a:pPr>
+            <a:r>
+              <a:rPr lang="en-US" sz="1400" b="1" dirty="0">
+                <a:solidFill>
+                  <a:srgbClr val="281F10"/>
                 </a:solidFill>
                 <a:latin typeface="Calibri" pitchFamily="34" charset="0"/>
                 <a:ea typeface="Calibri" pitchFamily="34" charset="-122"/>
@@ -1495,7 +1474,7 @@
               </a:rPr>
               <a:t>2–5 s sampling</a:t>
             </a:r>
-            <a:endParaRPr lang="en-US" sz="1350" dirty="0"/>
+            <a:endParaRPr lang="en-US" sz="1400" dirty="0"/>
           </a:p>
         </p:txBody>
       </p:sp>
@@ -1523,17 +1502,6 @@
             <a:pPr indent="0" marL="0">
               <a:buNone/>
             </a:pPr>
-            <a:r>
-              <a:rPr lang="en-US" sz="1250" dirty="0">
-                <a:solidFill>
-                  <a:srgbClr val="6E6146"/>
-                </a:solidFill>
-                <a:latin typeface="Calibri" pitchFamily="34" charset="0"/>
-                <a:ea typeface="Calibri" pitchFamily="34" charset="-122"/>
-                <a:cs typeface="Calibri" pitchFamily="34" charset="-120"/>
-              </a:rPr>
-              <a:t>Fog &amp; Edge Computing (H9FECC)   ·   deployed live on AWS</a:t>
-            </a:r>
             <a:endParaRPr lang="en-US" sz="1250" dirty="0"/>
           </a:p>
         </p:txBody>
